--- a/youtube_ranking_20260517.pptx
+++ b/youtube_ranking_20260517.pptx
@@ -3371,23 +3371,82 @@
         <p:spPr>
           <a:xfrm>
             <a:off x="320040" y="960120"/>
-            <a:ext cx="4389120" cy="2468880"/>
+            <a:ext cx="3657600" cy="2057400"/>
           </a:xfrm>
           <a:prstGeom prst="rect">
             <a:avLst/>
           </a:prstGeom>
         </p:spPr>
       </p:pic>
-      <p:sp>
-        <p:nvSpPr>
-          <p:cNvPr id="5" name="TextBox 4"/>
-          <p:cNvSpPr txBox="1"/>
-          <p:nvPr/>
-        </p:nvSpPr>
-        <p:spPr>
-          <a:xfrm>
-            <a:off x="4937760" y="777240"/>
-            <a:ext cx="3931920" cy="1463040"/>
+      <p:pic>
+        <p:nvPicPr>
+          <p:cNvPr id="5" name="Picture 4" descr="image.png"/>
+          <p:cNvPicPr>
+            <a:picLocks noChangeAspect="1"/>
+          </p:cNvPicPr>
+          <p:nvPr/>
+        </p:nvPicPr>
+        <p:blipFill>
+          <a:blip r:embed="rId3"/>
+          <a:stretch>
+            <a:fillRect/>
+          </a:stretch>
+        </p:blipFill>
+        <p:spPr>
+          <a:xfrm>
+            <a:off x="320040" y="3090672"/>
+            <a:ext cx="1005840" cy="1005840"/>
+          </a:xfrm>
+          <a:prstGeom prst="rect">
+            <a:avLst/>
+          </a:prstGeom>
+        </p:spPr>
+      </p:pic>
+      <p:sp>
+        <p:nvSpPr>
+          <p:cNvPr id="6" name="TextBox 5"/>
+          <p:cNvSpPr txBox="1"/>
+          <p:nvPr/>
+        </p:nvSpPr>
+        <p:spPr>
+          <a:xfrm>
+            <a:off x="1417320" y="3246120"/>
+            <a:ext cx="2606040" cy="365760"/>
+          </a:xfrm>
+          <a:prstGeom prst="rect">
+            <a:avLst/>
+          </a:prstGeom>
+          <a:noFill/>
+        </p:spPr>
+        <p:txBody>
+          <a:bodyPr wrap="none">
+            <a:spAutoFit/>
+          </a:bodyPr>
+          <a:lstStyle/>
+          <a:p>
+            <a:pPr algn="l"/>
+            <a:r>
+              <a:rPr sz="700" b="0">
+                <a:solidFill>
+                  <a:srgbClr val="AAAAAA"/>
+                </a:solidFill>
+                <a:latin typeface="Arial"/>
+              </a:rPr>
+              <a:t>https://www.youtube.com/watch?v=FrhcoW_FDqo</a:t>
+            </a:r>
+          </a:p>
+        </p:txBody>
+      </p:sp>
+      <p:sp>
+        <p:nvSpPr>
+          <p:cNvPr id="7" name="TextBox 6"/>
+          <p:cNvSpPr txBox="1"/>
+          <p:nvPr/>
+        </p:nvSpPr>
+        <p:spPr>
+          <a:xfrm>
+            <a:off x="4160520" y="777240"/>
+            <a:ext cx="4663440" cy="1463040"/>
           </a:xfrm>
           <a:prstGeom prst="rect">
             <a:avLst/>
@@ -3407,7 +3466,7 @@
                   <a:srgbClr val="FFFFFF"/>
                 </a:solidFill>
                 <a:latin typeface="Arial"/>
-                <a:hlinkClick r:id="rId3"/>
+                <a:hlinkClick r:id="rId4"/>
               </a:rPr>
               <a:t>『フォルティクス 配信！推しを継ぐもの』予告編30秒（秘密組織〈ＴＴＦＣ〉編）【2026年6月7日（日）配信】</a:t>
             </a:r>
@@ -3416,14 +3475,14 @@
       </p:sp>
       <p:sp>
         <p:nvSpPr>
-          <p:cNvPr id="6" name="TextBox 5"/>
-          <p:cNvSpPr txBox="1"/>
-          <p:nvPr/>
-        </p:nvSpPr>
-        <p:spPr>
-          <a:xfrm>
-            <a:off x="4937760" y="2331720"/>
-            <a:ext cx="3931920" cy="292608"/>
+          <p:cNvPr id="8" name="TextBox 7"/>
+          <p:cNvSpPr txBox="1"/>
+          <p:nvPr/>
+        </p:nvSpPr>
+        <p:spPr>
+          <a:xfrm>
+            <a:off x="4160520" y="2331720"/>
+            <a:ext cx="4663440" cy="292608"/>
           </a:xfrm>
           <a:prstGeom prst="rect">
             <a:avLst/>
@@ -3451,14 +3510,14 @@
       </p:sp>
       <p:sp>
         <p:nvSpPr>
-          <p:cNvPr id="7" name="TextBox 6"/>
-          <p:cNvSpPr txBox="1"/>
-          <p:nvPr/>
-        </p:nvSpPr>
-        <p:spPr>
-          <a:xfrm>
-            <a:off x="4937760" y="2670048"/>
-            <a:ext cx="3931920" cy="320040"/>
+          <p:cNvPr id="9" name="TextBox 8"/>
+          <p:cNvSpPr txBox="1"/>
+          <p:nvPr/>
+        </p:nvSpPr>
+        <p:spPr>
+          <a:xfrm>
+            <a:off x="4160520" y="2670048"/>
+            <a:ext cx="4663440" cy="320040"/>
           </a:xfrm>
           <a:prstGeom prst="rect">
             <a:avLst/>
@@ -3486,14 +3545,14 @@
       </p:sp>
       <p:sp>
         <p:nvSpPr>
-          <p:cNvPr id="8" name="TextBox 7"/>
-          <p:cNvSpPr txBox="1"/>
-          <p:nvPr/>
-        </p:nvSpPr>
-        <p:spPr>
-          <a:xfrm>
-            <a:off x="4937760" y="3017520"/>
-            <a:ext cx="3931920" cy="292608"/>
+          <p:cNvPr id="10" name="TextBox 9"/>
+          <p:cNvSpPr txBox="1"/>
+          <p:nvPr/>
+        </p:nvSpPr>
+        <p:spPr>
+          <a:xfrm>
+            <a:off x="4160520" y="3035808"/>
+            <a:ext cx="4663440" cy="292608"/>
           </a:xfrm>
           <a:prstGeom prst="rect">
             <a:avLst/>
@@ -3514,20 +3573,20 @@
                 </a:solidFill>
                 <a:latin typeface="Arial"/>
               </a:rPr>
-              <a:t>⏱ 0:31  ·  公開0時間前</a:t>
-            </a:r>
-          </a:p>
-        </p:txBody>
-      </p:sp>
-      <p:sp>
-        <p:nvSpPr>
-          <p:cNvPr id="9" name="TextBox 8"/>
-          <p:cNvSpPr txBox="1"/>
-          <p:nvPr/>
-        </p:nvSpPr>
-        <p:spPr>
-          <a:xfrm>
-            <a:off x="320040" y="3547872"/>
+              <a:t>⏱ 0:31  ·  📅 公開2時間前</a:t>
+            </a:r>
+          </a:p>
+        </p:txBody>
+      </p:sp>
+      <p:sp>
+        <p:nvSpPr>
+          <p:cNvPr id="11" name="TextBox 10"/>
+          <p:cNvSpPr txBox="1"/>
+          <p:nvPr/>
+        </p:nvSpPr>
+        <p:spPr>
+          <a:xfrm>
+            <a:off x="320040" y="4160520"/>
             <a:ext cx="8503920" cy="548640"/>
           </a:xfrm>
           <a:prstGeom prst="rect">
@@ -3549,7 +3608,7 @@
                 </a:solidFill>
                 <a:latin typeface="Arial"/>
               </a:rPr>
-              <a:t>💡 公開0時間で急上昇入り！　急上昇中の新興コンテンツ　いいね率3.2%と好評価</a:t>
+              <a:t>💡 公開2時間で急上昇入り！　急上昇中の新興コンテンツ　いいね率3.2%と好評価</a:t>
             </a:r>
           </a:p>
         </p:txBody>
@@ -3752,24 +3811,48 @@
         </p:blipFill>
         <p:spPr>
           <a:xfrm>
-            <a:off x="2057400" y="1024128"/>
-            <a:ext cx="5029200" cy="2825496"/>
+            <a:off x="2286000" y="1024128"/>
+            <a:ext cx="4572000" cy="2569464"/>
           </a:xfrm>
           <a:prstGeom prst="rect">
             <a:avLst/>
           </a:prstGeom>
         </p:spPr>
       </p:pic>
-      <p:sp>
-        <p:nvSpPr>
-          <p:cNvPr id="7" name="TextBox 6"/>
-          <p:cNvSpPr txBox="1"/>
-          <p:nvPr/>
-        </p:nvSpPr>
-        <p:spPr>
-          <a:xfrm>
-            <a:off x="274320" y="3886200"/>
-            <a:ext cx="8595360" cy="457200"/>
+      <p:pic>
+        <p:nvPicPr>
+          <p:cNvPr id="7" name="Picture 6" descr="image.png"/>
+          <p:cNvPicPr>
+            <a:picLocks noChangeAspect="1"/>
+          </p:cNvPicPr>
+          <p:nvPr/>
+        </p:nvPicPr>
+        <p:blipFill>
+          <a:blip r:embed="rId3"/>
+          <a:stretch>
+            <a:fillRect/>
+          </a:stretch>
+        </p:blipFill>
+        <p:spPr>
+          <a:xfrm>
+            <a:off x="7818120" y="3639312"/>
+            <a:ext cx="1005840" cy="1005840"/>
+          </a:xfrm>
+          <a:prstGeom prst="rect">
+            <a:avLst/>
+          </a:prstGeom>
+        </p:spPr>
+      </p:pic>
+      <p:sp>
+        <p:nvSpPr>
+          <p:cNvPr id="8" name="TextBox 7"/>
+          <p:cNvSpPr txBox="1"/>
+          <p:nvPr/>
+        </p:nvSpPr>
+        <p:spPr>
+          <a:xfrm>
+            <a:off x="274320" y="3657600"/>
+            <a:ext cx="7406640" cy="457200"/>
           </a:xfrm>
           <a:prstGeom prst="rect">
             <a:avLst/>
@@ -3789,7 +3872,7 @@
                   <a:srgbClr val="FFFFFF"/>
                 </a:solidFill>
                 <a:latin typeface="Arial"/>
-                <a:hlinkClick r:id="rId3"/>
+                <a:hlinkClick r:id="rId4"/>
               </a:rPr>
               <a:t>初星学園 「ガラクタロード」Official Music Video (HATSUBOSHI GAKUEN -…</a:t>
             </a:r>
@@ -3798,14 +3881,14 @@
       </p:sp>
       <p:sp>
         <p:nvSpPr>
-          <p:cNvPr id="8" name="TextBox 7"/>
-          <p:cNvSpPr txBox="1"/>
-          <p:nvPr/>
-        </p:nvSpPr>
-        <p:spPr>
-          <a:xfrm>
-            <a:off x="274320" y="4370832"/>
-            <a:ext cx="8595360" cy="292608"/>
+          <p:cNvPr id="9" name="TextBox 8"/>
+          <p:cNvSpPr txBox="1"/>
+          <p:nvPr/>
+        </p:nvSpPr>
+        <p:spPr>
+          <a:xfrm>
+            <a:off x="274320" y="4160520"/>
+            <a:ext cx="7406640" cy="292608"/>
           </a:xfrm>
           <a:prstGeom prst="rect">
             <a:avLst/>
@@ -3826,21 +3909,21 @@
                 </a:solidFill>
                 <a:latin typeface="Arial"/>
               </a:rPr>
-              <a:t>👁 248,983  👍 18,630  💬 1,113  ⏱ 3:43  📅 公開11時間前</a:t>
-            </a:r>
-          </a:p>
-        </p:txBody>
-      </p:sp>
-      <p:sp>
-        <p:nvSpPr>
-          <p:cNvPr id="9" name="TextBox 8"/>
-          <p:cNvSpPr txBox="1"/>
-          <p:nvPr/>
-        </p:nvSpPr>
-        <p:spPr>
-          <a:xfrm>
-            <a:off x="274320" y="4690872"/>
-            <a:ext cx="8595360" cy="292608"/>
+              <a:t>👁 248,983  👍 18,630  💬 1,113  ⏱ 3:43  📅 公開14時間前</a:t>
+            </a:r>
+          </a:p>
+        </p:txBody>
+      </p:sp>
+      <p:sp>
+        <p:nvSpPr>
+          <p:cNvPr id="10" name="TextBox 9"/>
+          <p:cNvSpPr txBox="1"/>
+          <p:nvPr/>
+        </p:nvSpPr>
+        <p:spPr>
+          <a:xfrm>
+            <a:off x="274320" y="4498848"/>
+            <a:ext cx="7406640" cy="292608"/>
           </a:xfrm>
           <a:prstGeom prst="rect">
             <a:avLst/>
@@ -3861,7 +3944,42 @@
                 </a:solidFill>
                 <a:latin typeface="Arial"/>
               </a:rPr>
-              <a:t>💡 公開11時間で急上昇入り！　10万再生突破の話題作　いいね率7.5%と視聴者の支持が非常に高い</a:t>
+              <a:t>💡 公開14時間で急上昇入り！　10万再生突破の話題作　いいね率7.5%と視聴者の支持が非常に高い</a:t>
+            </a:r>
+          </a:p>
+        </p:txBody>
+      </p:sp>
+      <p:sp>
+        <p:nvSpPr>
+          <p:cNvPr id="11" name="TextBox 10"/>
+          <p:cNvSpPr txBox="1"/>
+          <p:nvPr/>
+        </p:nvSpPr>
+        <p:spPr>
+          <a:xfrm>
+            <a:off x="274320" y="4498848"/>
+            <a:ext cx="7406640" cy="228600"/>
+          </a:xfrm>
+          <a:prstGeom prst="rect">
+            <a:avLst/>
+          </a:prstGeom>
+          <a:noFill/>
+        </p:spPr>
+        <p:txBody>
+          <a:bodyPr wrap="none">
+            <a:spAutoFit/>
+          </a:bodyPr>
+          <a:lstStyle/>
+          <a:p>
+            <a:pPr algn="ctr"/>
+            <a:r>
+              <a:rPr sz="700" b="0">
+                <a:solidFill>
+                  <a:srgbClr val="AAAAAA"/>
+                </a:solidFill>
+                <a:latin typeface="Arial"/>
+              </a:rPr>
+              <a:t>https://www.youtube.com/watch?v=O9oCfxSJXTY</a:t>
             </a:r>
           </a:p>
         </p:txBody>
@@ -4075,7 +4193,7 @@
         <p:spPr>
           <a:xfrm>
             <a:off x="2697480" y="786384"/>
-            <a:ext cx="6035040" cy="347472"/>
+            <a:ext cx="5212080" cy="347472"/>
           </a:xfrm>
           <a:prstGeom prst="rect">
             <a:avLst/>
@@ -4102,16 +4220,40 @@
           </a:p>
         </p:txBody>
       </p:sp>
-      <p:sp>
-        <p:nvSpPr>
-          <p:cNvPr id="8" name="TextBox 7"/>
+      <p:pic>
+        <p:nvPicPr>
+          <p:cNvPr id="8" name="Picture 7" descr="image.png"/>
+          <p:cNvPicPr>
+            <a:picLocks noChangeAspect="1"/>
+          </p:cNvPicPr>
+          <p:nvPr/>
+        </p:nvPicPr>
+        <p:blipFill>
+          <a:blip r:embed="rId4"/>
+          <a:stretch>
+            <a:fillRect/>
+          </a:stretch>
+        </p:blipFill>
+        <p:spPr>
+          <a:xfrm>
+            <a:off x="8046720" y="804672"/>
+            <a:ext cx="685800" cy="685800"/>
+          </a:xfrm>
+          <a:prstGeom prst="rect">
+            <a:avLst/>
+          </a:prstGeom>
+        </p:spPr>
+      </p:pic>
+      <p:sp>
+        <p:nvSpPr>
+          <p:cNvPr id="9" name="TextBox 8"/>
           <p:cNvSpPr txBox="1"/>
           <p:nvPr/>
         </p:nvSpPr>
         <p:spPr>
           <a:xfrm>
             <a:off x="2697480" y="1207008"/>
-            <a:ext cx="6035040" cy="292608"/>
+            <a:ext cx="5212080" cy="292608"/>
           </a:xfrm>
           <a:prstGeom prst="rect">
             <a:avLst/>
@@ -4139,7 +4281,7 @@
       </p:sp>
       <p:sp>
         <p:nvSpPr>
-          <p:cNvPr id="9" name="Rectangle 8"/>
+          <p:cNvPr id="10" name="Rectangle 9"/>
           <p:cNvSpPr/>
           <p:nvPr/>
         </p:nvSpPr>
@@ -4184,14 +4326,14 @@
       </p:sp>
       <p:pic>
         <p:nvPicPr>
-          <p:cNvPr id="10" name="Picture 9" descr="image.jpg"/>
+          <p:cNvPr id="11" name="Picture 10" descr="image.jpg"/>
           <p:cNvPicPr>
             <a:picLocks noChangeAspect="1"/>
           </p:cNvPicPr>
           <p:nvPr/>
         </p:nvPicPr>
         <p:blipFill>
-          <a:blip r:embed="rId4"/>
+          <a:blip r:embed="rId5"/>
           <a:stretch>
             <a:fillRect/>
           </a:stretch>
@@ -4208,7 +4350,7 @@
       </p:pic>
       <p:sp>
         <p:nvSpPr>
-          <p:cNvPr id="11" name="TextBox 10"/>
+          <p:cNvPr id="12" name="TextBox 11"/>
           <p:cNvSpPr txBox="1"/>
           <p:nvPr/>
         </p:nvSpPr>
@@ -4243,14 +4385,14 @@
       </p:sp>
       <p:sp>
         <p:nvSpPr>
-          <p:cNvPr id="12" name="TextBox 11"/>
+          <p:cNvPr id="13" name="TextBox 12"/>
           <p:cNvSpPr txBox="1"/>
           <p:nvPr/>
         </p:nvSpPr>
         <p:spPr>
           <a:xfrm>
             <a:off x="2697480" y="1664208"/>
-            <a:ext cx="6035040" cy="347472"/>
+            <a:ext cx="5212080" cy="347472"/>
           </a:xfrm>
           <a:prstGeom prst="rect">
             <a:avLst/>
@@ -4270,23 +4412,47 @@
                   <a:srgbClr val="FFFFFF"/>
                 </a:solidFill>
                 <a:latin typeface="Arial"/>
-                <a:hlinkClick r:id="rId5"/>
+                <a:hlinkClick r:id="rId6"/>
               </a:rPr>
               <a:t>無反応挑戦　w#おもしろ＃おもしろ動画＃エンタメ#お笑い#バラエティ#テレビ#バズれ…</a:t>
             </a:r>
           </a:p>
         </p:txBody>
       </p:sp>
-      <p:sp>
-        <p:nvSpPr>
-          <p:cNvPr id="13" name="TextBox 12"/>
+      <p:pic>
+        <p:nvPicPr>
+          <p:cNvPr id="14" name="Picture 13" descr="image.png"/>
+          <p:cNvPicPr>
+            <a:picLocks noChangeAspect="1"/>
+          </p:cNvPicPr>
+          <p:nvPr/>
+        </p:nvPicPr>
+        <p:blipFill>
+          <a:blip r:embed="rId7"/>
+          <a:stretch>
+            <a:fillRect/>
+          </a:stretch>
+        </p:blipFill>
+        <p:spPr>
+          <a:xfrm>
+            <a:off x="8046720" y="1682496"/>
+            <a:ext cx="685800" cy="685800"/>
+          </a:xfrm>
+          <a:prstGeom prst="rect">
+            <a:avLst/>
+          </a:prstGeom>
+        </p:spPr>
+      </p:pic>
+      <p:sp>
+        <p:nvSpPr>
+          <p:cNvPr id="15" name="TextBox 14"/>
           <p:cNvSpPr txBox="1"/>
           <p:nvPr/>
         </p:nvSpPr>
         <p:spPr>
           <a:xfrm>
             <a:off x="2697480" y="2084832"/>
-            <a:ext cx="6035040" cy="292608"/>
+            <a:ext cx="5212080" cy="292608"/>
           </a:xfrm>
           <a:prstGeom prst="rect">
             <a:avLst/>
@@ -4314,7 +4480,7 @@
       </p:sp>
       <p:sp>
         <p:nvSpPr>
-          <p:cNvPr id="14" name="Rectangle 13"/>
+          <p:cNvPr id="16" name="Rectangle 15"/>
           <p:cNvSpPr/>
           <p:nvPr/>
         </p:nvSpPr>
@@ -4359,14 +4525,14 @@
       </p:sp>
       <p:pic>
         <p:nvPicPr>
-          <p:cNvPr id="15" name="Picture 14" descr="image.jpg"/>
+          <p:cNvPr id="17" name="Picture 16" descr="image.jpg"/>
           <p:cNvPicPr>
             <a:picLocks noChangeAspect="1"/>
           </p:cNvPicPr>
           <p:nvPr/>
         </p:nvPicPr>
         <p:blipFill>
-          <a:blip r:embed="rId6"/>
+          <a:blip r:embed="rId8"/>
           <a:stretch>
             <a:fillRect/>
           </a:stretch>
@@ -4383,7 +4549,7 @@
       </p:pic>
       <p:sp>
         <p:nvSpPr>
-          <p:cNvPr id="16" name="TextBox 15"/>
+          <p:cNvPr id="18" name="TextBox 17"/>
           <p:cNvSpPr txBox="1"/>
           <p:nvPr/>
         </p:nvSpPr>
@@ -4418,14 +4584,14 @@
       </p:sp>
       <p:sp>
         <p:nvSpPr>
-          <p:cNvPr id="17" name="TextBox 16"/>
+          <p:cNvPr id="19" name="TextBox 18"/>
           <p:cNvSpPr txBox="1"/>
           <p:nvPr/>
         </p:nvSpPr>
         <p:spPr>
           <a:xfrm>
             <a:off x="2697480" y="2542032"/>
-            <a:ext cx="6035040" cy="347472"/>
+            <a:ext cx="5212080" cy="347472"/>
           </a:xfrm>
           <a:prstGeom prst="rect">
             <a:avLst/>
@@ -4445,23 +4611,47 @@
                   <a:srgbClr val="FFFFFF"/>
                 </a:solidFill>
                 <a:latin typeface="Arial"/>
-                <a:hlinkClick r:id="rId7"/>
+                <a:hlinkClick r:id="rId9"/>
               </a:rPr>
               <a:t>狩野英孝のマイクラ実況が面白いwww#エンタメ #マイクラ #狩野英孝</a:t>
             </a:r>
           </a:p>
         </p:txBody>
       </p:sp>
-      <p:sp>
-        <p:nvSpPr>
-          <p:cNvPr id="18" name="TextBox 17"/>
+      <p:pic>
+        <p:nvPicPr>
+          <p:cNvPr id="20" name="Picture 19" descr="image.png"/>
+          <p:cNvPicPr>
+            <a:picLocks noChangeAspect="1"/>
+          </p:cNvPicPr>
+          <p:nvPr/>
+        </p:nvPicPr>
+        <p:blipFill>
+          <a:blip r:embed="rId10"/>
+          <a:stretch>
+            <a:fillRect/>
+          </a:stretch>
+        </p:blipFill>
+        <p:spPr>
+          <a:xfrm>
+            <a:off x="8046720" y="2560320"/>
+            <a:ext cx="685800" cy="685800"/>
+          </a:xfrm>
+          <a:prstGeom prst="rect">
+            <a:avLst/>
+          </a:prstGeom>
+        </p:spPr>
+      </p:pic>
+      <p:sp>
+        <p:nvSpPr>
+          <p:cNvPr id="21" name="TextBox 20"/>
           <p:cNvSpPr txBox="1"/>
           <p:nvPr/>
         </p:nvSpPr>
         <p:spPr>
           <a:xfrm>
             <a:off x="2697480" y="2962656"/>
-            <a:ext cx="6035040" cy="292608"/>
+            <a:ext cx="5212080" cy="292608"/>
           </a:xfrm>
           <a:prstGeom prst="rect">
             <a:avLst/>
@@ -4489,7 +4679,7 @@
       </p:sp>
       <p:sp>
         <p:nvSpPr>
-          <p:cNvPr id="19" name="Rectangle 18"/>
+          <p:cNvPr id="22" name="Rectangle 21"/>
           <p:cNvSpPr/>
           <p:nvPr/>
         </p:nvSpPr>
@@ -4534,14 +4724,14 @@
       </p:sp>
       <p:pic>
         <p:nvPicPr>
-          <p:cNvPr id="20" name="Picture 19" descr="image.jpg"/>
+          <p:cNvPr id="23" name="Picture 22" descr="image.jpg"/>
           <p:cNvPicPr>
             <a:picLocks noChangeAspect="1"/>
           </p:cNvPicPr>
           <p:nvPr/>
         </p:nvPicPr>
         <p:blipFill>
-          <a:blip r:embed="rId8"/>
+          <a:blip r:embed="rId11"/>
           <a:stretch>
             <a:fillRect/>
           </a:stretch>
@@ -4558,7 +4748,7 @@
       </p:pic>
       <p:sp>
         <p:nvSpPr>
-          <p:cNvPr id="21" name="TextBox 20"/>
+          <p:cNvPr id="24" name="TextBox 23"/>
           <p:cNvSpPr txBox="1"/>
           <p:nvPr/>
         </p:nvSpPr>
@@ -4593,14 +4783,14 @@
       </p:sp>
       <p:sp>
         <p:nvSpPr>
-          <p:cNvPr id="22" name="TextBox 21"/>
+          <p:cNvPr id="25" name="TextBox 24"/>
           <p:cNvSpPr txBox="1"/>
           <p:nvPr/>
         </p:nvSpPr>
         <p:spPr>
           <a:xfrm>
             <a:off x="2697480" y="3419856"/>
-            <a:ext cx="6035040" cy="347472"/>
+            <a:ext cx="5212080" cy="347472"/>
           </a:xfrm>
           <a:prstGeom prst="rect">
             <a:avLst/>
@@ -4620,23 +4810,47 @@
                   <a:srgbClr val="FFFFFF"/>
                 </a:solidFill>
                 <a:latin typeface="Arial"/>
-                <a:hlinkClick r:id="rId9"/>
+                <a:hlinkClick r:id="rId12"/>
               </a:rPr>
               <a:t>ネプリーグ放送事故w #おもしろ #面白い #テレビ #エンタメ #お笑い #芸人 …</a:t>
             </a:r>
           </a:p>
         </p:txBody>
       </p:sp>
-      <p:sp>
-        <p:nvSpPr>
-          <p:cNvPr id="23" name="TextBox 22"/>
+      <p:pic>
+        <p:nvPicPr>
+          <p:cNvPr id="26" name="Picture 25" descr="image.png"/>
+          <p:cNvPicPr>
+            <a:picLocks noChangeAspect="1"/>
+          </p:cNvPicPr>
+          <p:nvPr/>
+        </p:nvPicPr>
+        <p:blipFill>
+          <a:blip r:embed="rId13"/>
+          <a:stretch>
+            <a:fillRect/>
+          </a:stretch>
+        </p:blipFill>
+        <p:spPr>
+          <a:xfrm>
+            <a:off x="8046720" y="3438144"/>
+            <a:ext cx="685800" cy="685800"/>
+          </a:xfrm>
+          <a:prstGeom prst="rect">
+            <a:avLst/>
+          </a:prstGeom>
+        </p:spPr>
+      </p:pic>
+      <p:sp>
+        <p:nvSpPr>
+          <p:cNvPr id="27" name="TextBox 26"/>
           <p:cNvSpPr txBox="1"/>
           <p:nvPr/>
         </p:nvSpPr>
         <p:spPr>
           <a:xfrm>
             <a:off x="2697480" y="3840480"/>
-            <a:ext cx="6035040" cy="292608"/>
+            <a:ext cx="5212080" cy="292608"/>
           </a:xfrm>
           <a:prstGeom prst="rect">
             <a:avLst/>
@@ -4664,7 +4878,7 @@
       </p:sp>
       <p:sp>
         <p:nvSpPr>
-          <p:cNvPr id="24" name="Rectangle 23"/>
+          <p:cNvPr id="28" name="Rectangle 27"/>
           <p:cNvSpPr/>
           <p:nvPr/>
         </p:nvSpPr>
@@ -4709,14 +4923,14 @@
       </p:sp>
       <p:pic>
         <p:nvPicPr>
-          <p:cNvPr id="25" name="Picture 24" descr="image.jpg"/>
+          <p:cNvPr id="29" name="Picture 28" descr="image.jpg"/>
           <p:cNvPicPr>
             <a:picLocks noChangeAspect="1"/>
           </p:cNvPicPr>
           <p:nvPr/>
         </p:nvPicPr>
         <p:blipFill>
-          <a:blip r:embed="rId10"/>
+          <a:blip r:embed="rId14"/>
           <a:stretch>
             <a:fillRect/>
           </a:stretch>
@@ -4733,7 +4947,7 @@
       </p:pic>
       <p:sp>
         <p:nvSpPr>
-          <p:cNvPr id="26" name="TextBox 25"/>
+          <p:cNvPr id="30" name="TextBox 29"/>
           <p:cNvSpPr txBox="1"/>
           <p:nvPr/>
         </p:nvSpPr>
@@ -4768,14 +4982,14 @@
       </p:sp>
       <p:sp>
         <p:nvSpPr>
-          <p:cNvPr id="27" name="TextBox 26"/>
+          <p:cNvPr id="31" name="TextBox 30"/>
           <p:cNvSpPr txBox="1"/>
           <p:nvPr/>
         </p:nvSpPr>
         <p:spPr>
           <a:xfrm>
             <a:off x="2697480" y="4297680"/>
-            <a:ext cx="6035040" cy="347472"/>
+            <a:ext cx="5212080" cy="347472"/>
           </a:xfrm>
           <a:prstGeom prst="rect">
             <a:avLst/>
@@ -4795,23 +5009,47 @@
                   <a:srgbClr val="FFFFFF"/>
                 </a:solidFill>
                 <a:latin typeface="Arial"/>
-                <a:hlinkClick r:id="rId11"/>
+                <a:hlinkClick r:id="rId15"/>
               </a:rPr>
               <a:t>入れないと蝶野に制裁ビンタされる⁉️ #エンタメ #ガキ使 #ダウンタウン#方正</a:t>
             </a:r>
           </a:p>
         </p:txBody>
       </p:sp>
-      <p:sp>
-        <p:nvSpPr>
-          <p:cNvPr id="28" name="TextBox 27"/>
+      <p:pic>
+        <p:nvPicPr>
+          <p:cNvPr id="32" name="Picture 31" descr="image.png"/>
+          <p:cNvPicPr>
+            <a:picLocks noChangeAspect="1"/>
+          </p:cNvPicPr>
+          <p:nvPr/>
+        </p:nvPicPr>
+        <p:blipFill>
+          <a:blip r:embed="rId16"/>
+          <a:stretch>
+            <a:fillRect/>
+          </a:stretch>
+        </p:blipFill>
+        <p:spPr>
+          <a:xfrm>
+            <a:off x="8046720" y="4315968"/>
+            <a:ext cx="685800" cy="685800"/>
+          </a:xfrm>
+          <a:prstGeom prst="rect">
+            <a:avLst/>
+          </a:prstGeom>
+        </p:spPr>
+      </p:pic>
+      <p:sp>
+        <p:nvSpPr>
+          <p:cNvPr id="33" name="TextBox 32"/>
           <p:cNvSpPr txBox="1"/>
           <p:nvPr/>
         </p:nvSpPr>
         <p:spPr>
           <a:xfrm>
             <a:off x="2697480" y="4718304"/>
-            <a:ext cx="6035040" cy="292608"/>
+            <a:ext cx="5212080" cy="292608"/>
           </a:xfrm>
           <a:prstGeom prst="rect">
             <a:avLst/>
@@ -5046,7 +5284,7 @@
         <p:spPr>
           <a:xfrm>
             <a:off x="2697480" y="786384"/>
-            <a:ext cx="6035040" cy="347472"/>
+            <a:ext cx="5212080" cy="347472"/>
           </a:xfrm>
           <a:prstGeom prst="rect">
             <a:avLst/>
@@ -5073,16 +5311,40 @@
           </a:p>
         </p:txBody>
       </p:sp>
-      <p:sp>
-        <p:nvSpPr>
-          <p:cNvPr id="8" name="TextBox 7"/>
+      <p:pic>
+        <p:nvPicPr>
+          <p:cNvPr id="8" name="Picture 7" descr="image.png"/>
+          <p:cNvPicPr>
+            <a:picLocks noChangeAspect="1"/>
+          </p:cNvPicPr>
+          <p:nvPr/>
+        </p:nvPicPr>
+        <p:blipFill>
+          <a:blip r:embed="rId4"/>
+          <a:stretch>
+            <a:fillRect/>
+          </a:stretch>
+        </p:blipFill>
+        <p:spPr>
+          <a:xfrm>
+            <a:off x="8046720" y="804672"/>
+            <a:ext cx="685800" cy="685800"/>
+          </a:xfrm>
+          <a:prstGeom prst="rect">
+            <a:avLst/>
+          </a:prstGeom>
+        </p:spPr>
+      </p:pic>
+      <p:sp>
+        <p:nvSpPr>
+          <p:cNvPr id="9" name="TextBox 8"/>
           <p:cNvSpPr txBox="1"/>
           <p:nvPr/>
         </p:nvSpPr>
         <p:spPr>
           <a:xfrm>
             <a:off x="2697480" y="1207008"/>
-            <a:ext cx="6035040" cy="292608"/>
+            <a:ext cx="5212080" cy="292608"/>
           </a:xfrm>
           <a:prstGeom prst="rect">
             <a:avLst/>
@@ -5110,7 +5372,7 @@
       </p:sp>
       <p:sp>
         <p:nvSpPr>
-          <p:cNvPr id="9" name="Rectangle 8"/>
+          <p:cNvPr id="10" name="Rectangle 9"/>
           <p:cNvSpPr/>
           <p:nvPr/>
         </p:nvSpPr>
@@ -5155,14 +5417,14 @@
       </p:sp>
       <p:pic>
         <p:nvPicPr>
-          <p:cNvPr id="10" name="Picture 9" descr="image.jpg"/>
+          <p:cNvPr id="11" name="Picture 10" descr="image.jpg"/>
           <p:cNvPicPr>
             <a:picLocks noChangeAspect="1"/>
           </p:cNvPicPr>
           <p:nvPr/>
         </p:nvPicPr>
         <p:blipFill>
-          <a:blip r:embed="rId4"/>
+          <a:blip r:embed="rId5"/>
           <a:stretch>
             <a:fillRect/>
           </a:stretch>
@@ -5179,7 +5441,7 @@
       </p:pic>
       <p:sp>
         <p:nvSpPr>
-          <p:cNvPr id="11" name="TextBox 10"/>
+          <p:cNvPr id="12" name="TextBox 11"/>
           <p:cNvSpPr txBox="1"/>
           <p:nvPr/>
         </p:nvSpPr>
@@ -5214,14 +5476,14 @@
       </p:sp>
       <p:sp>
         <p:nvSpPr>
-          <p:cNvPr id="12" name="TextBox 11"/>
+          <p:cNvPr id="13" name="TextBox 12"/>
           <p:cNvSpPr txBox="1"/>
           <p:nvPr/>
         </p:nvSpPr>
         <p:spPr>
           <a:xfrm>
             <a:off x="2697480" y="1664208"/>
-            <a:ext cx="6035040" cy="347472"/>
+            <a:ext cx="5212080" cy="347472"/>
           </a:xfrm>
           <a:prstGeom prst="rect">
             <a:avLst/>
@@ -5241,23 +5503,47 @@
                   <a:srgbClr val="FFFFFF"/>
                 </a:solidFill>
                 <a:latin typeface="Arial"/>
-                <a:hlinkClick r:id="rId5"/>
+                <a:hlinkClick r:id="rId6"/>
               </a:rPr>
               <a:t>感動のダブルスイカ‼️ #スイカゲーム #ゲーム実況 #サワヤンゲームズ</a:t>
             </a:r>
           </a:p>
         </p:txBody>
       </p:sp>
-      <p:sp>
-        <p:nvSpPr>
-          <p:cNvPr id="13" name="TextBox 12"/>
+      <p:pic>
+        <p:nvPicPr>
+          <p:cNvPr id="14" name="Picture 13" descr="image.png"/>
+          <p:cNvPicPr>
+            <a:picLocks noChangeAspect="1"/>
+          </p:cNvPicPr>
+          <p:nvPr/>
+        </p:nvPicPr>
+        <p:blipFill>
+          <a:blip r:embed="rId7"/>
+          <a:stretch>
+            <a:fillRect/>
+          </a:stretch>
+        </p:blipFill>
+        <p:spPr>
+          <a:xfrm>
+            <a:off x="8046720" y="1682496"/>
+            <a:ext cx="685800" cy="685800"/>
+          </a:xfrm>
+          <a:prstGeom prst="rect">
+            <a:avLst/>
+          </a:prstGeom>
+        </p:spPr>
+      </p:pic>
+      <p:sp>
+        <p:nvSpPr>
+          <p:cNvPr id="15" name="TextBox 14"/>
           <p:cNvSpPr txBox="1"/>
           <p:nvPr/>
         </p:nvSpPr>
         <p:spPr>
           <a:xfrm>
             <a:off x="2697480" y="2084832"/>
-            <a:ext cx="6035040" cy="292608"/>
+            <a:ext cx="5212080" cy="292608"/>
           </a:xfrm>
           <a:prstGeom prst="rect">
             <a:avLst/>
@@ -5285,7 +5571,7 @@
       </p:sp>
       <p:sp>
         <p:nvSpPr>
-          <p:cNvPr id="14" name="Rectangle 13"/>
+          <p:cNvPr id="16" name="Rectangle 15"/>
           <p:cNvSpPr/>
           <p:nvPr/>
         </p:nvSpPr>
@@ -5330,14 +5616,14 @@
       </p:sp>
       <p:pic>
         <p:nvPicPr>
-          <p:cNvPr id="15" name="Picture 14" descr="image.jpg"/>
+          <p:cNvPr id="17" name="Picture 16" descr="image.jpg"/>
           <p:cNvPicPr>
             <a:picLocks noChangeAspect="1"/>
           </p:cNvPicPr>
           <p:nvPr/>
         </p:nvPicPr>
         <p:blipFill>
-          <a:blip r:embed="rId6"/>
+          <a:blip r:embed="rId8"/>
           <a:stretch>
             <a:fillRect/>
           </a:stretch>
@@ -5354,7 +5640,7 @@
       </p:pic>
       <p:sp>
         <p:nvSpPr>
-          <p:cNvPr id="16" name="TextBox 15"/>
+          <p:cNvPr id="18" name="TextBox 17"/>
           <p:cNvSpPr txBox="1"/>
           <p:nvPr/>
         </p:nvSpPr>
@@ -5389,14 +5675,14 @@
       </p:sp>
       <p:sp>
         <p:nvSpPr>
-          <p:cNvPr id="17" name="TextBox 16"/>
+          <p:cNvPr id="19" name="TextBox 18"/>
           <p:cNvSpPr txBox="1"/>
           <p:nvPr/>
         </p:nvSpPr>
         <p:spPr>
           <a:xfrm>
             <a:off x="2697480" y="2542032"/>
-            <a:ext cx="6035040" cy="347472"/>
+            <a:ext cx="5212080" cy="347472"/>
           </a:xfrm>
           <a:prstGeom prst="rect">
             <a:avLst/>
@@ -5416,23 +5702,47 @@
                   <a:srgbClr val="FFFFFF"/>
                 </a:solidFill>
                 <a:latin typeface="Arial"/>
-                <a:hlinkClick r:id="rId7"/>
+                <a:hlinkClick r:id="rId9"/>
               </a:rPr>
               <a:t>全部ひっかかる人【しょぼんのアクション3D】 #ゲーム実況</a:t>
             </a:r>
           </a:p>
         </p:txBody>
       </p:sp>
-      <p:sp>
-        <p:nvSpPr>
-          <p:cNvPr id="18" name="TextBox 17"/>
+      <p:pic>
+        <p:nvPicPr>
+          <p:cNvPr id="20" name="Picture 19" descr="image.png"/>
+          <p:cNvPicPr>
+            <a:picLocks noChangeAspect="1"/>
+          </p:cNvPicPr>
+          <p:nvPr/>
+        </p:nvPicPr>
+        <p:blipFill>
+          <a:blip r:embed="rId10"/>
+          <a:stretch>
+            <a:fillRect/>
+          </a:stretch>
+        </p:blipFill>
+        <p:spPr>
+          <a:xfrm>
+            <a:off x="8046720" y="2560320"/>
+            <a:ext cx="685800" cy="685800"/>
+          </a:xfrm>
+          <a:prstGeom prst="rect">
+            <a:avLst/>
+          </a:prstGeom>
+        </p:spPr>
+      </p:pic>
+      <p:sp>
+        <p:nvSpPr>
+          <p:cNvPr id="21" name="TextBox 20"/>
           <p:cNvSpPr txBox="1"/>
           <p:nvPr/>
         </p:nvSpPr>
         <p:spPr>
           <a:xfrm>
             <a:off x="2697480" y="2962656"/>
-            <a:ext cx="6035040" cy="292608"/>
+            <a:ext cx="5212080" cy="292608"/>
           </a:xfrm>
           <a:prstGeom prst="rect">
             <a:avLst/>
@@ -5460,7 +5770,7 @@
       </p:sp>
       <p:sp>
         <p:nvSpPr>
-          <p:cNvPr id="19" name="Rectangle 18"/>
+          <p:cNvPr id="22" name="Rectangle 21"/>
           <p:cNvSpPr/>
           <p:nvPr/>
         </p:nvSpPr>
@@ -5505,14 +5815,14 @@
       </p:sp>
       <p:pic>
         <p:nvPicPr>
-          <p:cNvPr id="20" name="Picture 19" descr="image.jpg"/>
+          <p:cNvPr id="23" name="Picture 22" descr="image.jpg"/>
           <p:cNvPicPr>
             <a:picLocks noChangeAspect="1"/>
           </p:cNvPicPr>
           <p:nvPr/>
         </p:nvPicPr>
         <p:blipFill>
-          <a:blip r:embed="rId8"/>
+          <a:blip r:embed="rId11"/>
           <a:stretch>
             <a:fillRect/>
           </a:stretch>
@@ -5529,7 +5839,7 @@
       </p:pic>
       <p:sp>
         <p:nvSpPr>
-          <p:cNvPr id="21" name="TextBox 20"/>
+          <p:cNvPr id="24" name="TextBox 23"/>
           <p:cNvSpPr txBox="1"/>
           <p:nvPr/>
         </p:nvSpPr>
@@ -5564,14 +5874,14 @@
       </p:sp>
       <p:sp>
         <p:nvSpPr>
-          <p:cNvPr id="22" name="TextBox 21"/>
+          <p:cNvPr id="25" name="TextBox 24"/>
           <p:cNvSpPr txBox="1"/>
           <p:nvPr/>
         </p:nvSpPr>
         <p:spPr>
           <a:xfrm>
             <a:off x="2697480" y="3419856"/>
-            <a:ext cx="6035040" cy="347472"/>
+            <a:ext cx="5212080" cy="347472"/>
           </a:xfrm>
           <a:prstGeom prst="rect">
             <a:avLst/>
@@ -5591,23 +5901,47 @@
                   <a:srgbClr val="FFFFFF"/>
                 </a:solidFill>
                 <a:latin typeface="Arial"/>
-                <a:hlinkClick r:id="rId9"/>
+                <a:hlinkClick r:id="rId12"/>
               </a:rPr>
               <a:t>ロシア人を質問責めしたら反応がカワイイwwwww【Liar’s Bar/ライアーズバ…</a:t>
             </a:r>
           </a:p>
         </p:txBody>
       </p:sp>
-      <p:sp>
-        <p:nvSpPr>
-          <p:cNvPr id="23" name="TextBox 22"/>
+      <p:pic>
+        <p:nvPicPr>
+          <p:cNvPr id="26" name="Picture 25" descr="image.png"/>
+          <p:cNvPicPr>
+            <a:picLocks noChangeAspect="1"/>
+          </p:cNvPicPr>
+          <p:nvPr/>
+        </p:nvPicPr>
+        <p:blipFill>
+          <a:blip r:embed="rId13"/>
+          <a:stretch>
+            <a:fillRect/>
+          </a:stretch>
+        </p:blipFill>
+        <p:spPr>
+          <a:xfrm>
+            <a:off x="8046720" y="3438144"/>
+            <a:ext cx="685800" cy="685800"/>
+          </a:xfrm>
+          <a:prstGeom prst="rect">
+            <a:avLst/>
+          </a:prstGeom>
+        </p:spPr>
+      </p:pic>
+      <p:sp>
+        <p:nvSpPr>
+          <p:cNvPr id="27" name="TextBox 26"/>
           <p:cNvSpPr txBox="1"/>
           <p:nvPr/>
         </p:nvSpPr>
         <p:spPr>
           <a:xfrm>
             <a:off x="2697480" y="3840480"/>
-            <a:ext cx="6035040" cy="292608"/>
+            <a:ext cx="5212080" cy="292608"/>
           </a:xfrm>
           <a:prstGeom prst="rect">
             <a:avLst/>
@@ -5635,7 +5969,7 @@
       </p:sp>
       <p:sp>
         <p:nvSpPr>
-          <p:cNvPr id="24" name="Rectangle 23"/>
+          <p:cNvPr id="28" name="Rectangle 27"/>
           <p:cNvSpPr/>
           <p:nvPr/>
         </p:nvSpPr>
@@ -5680,14 +6014,14 @@
       </p:sp>
       <p:pic>
         <p:nvPicPr>
-          <p:cNvPr id="25" name="Picture 24" descr="image.jpg"/>
+          <p:cNvPr id="29" name="Picture 28" descr="image.jpg"/>
           <p:cNvPicPr>
             <a:picLocks noChangeAspect="1"/>
           </p:cNvPicPr>
           <p:nvPr/>
         </p:nvPicPr>
         <p:blipFill>
-          <a:blip r:embed="rId10"/>
+          <a:blip r:embed="rId14"/>
           <a:stretch>
             <a:fillRect/>
           </a:stretch>
@@ -5704,7 +6038,7 @@
       </p:pic>
       <p:sp>
         <p:nvSpPr>
-          <p:cNvPr id="26" name="TextBox 25"/>
+          <p:cNvPr id="30" name="TextBox 29"/>
           <p:cNvSpPr txBox="1"/>
           <p:nvPr/>
         </p:nvSpPr>
@@ -5739,14 +6073,14 @@
       </p:sp>
       <p:sp>
         <p:nvSpPr>
-          <p:cNvPr id="27" name="TextBox 26"/>
+          <p:cNvPr id="31" name="TextBox 30"/>
           <p:cNvSpPr txBox="1"/>
           <p:nvPr/>
         </p:nvSpPr>
         <p:spPr>
           <a:xfrm>
             <a:off x="2697480" y="4297680"/>
-            <a:ext cx="6035040" cy="347472"/>
+            <a:ext cx="5212080" cy="347472"/>
           </a:xfrm>
           <a:prstGeom prst="rect">
             <a:avLst/>
@@ -5766,23 +6100,47 @@
                   <a:srgbClr val="FFFFFF"/>
                 </a:solidFill>
                 <a:latin typeface="Arial"/>
-                <a:hlinkClick r:id="rId11"/>
+                <a:hlinkClick r:id="rId15"/>
               </a:rPr>
               <a:t>見たことの無い落ち方をする配信者#葉 #ゲーム実況 #切り抜き #onlyup</a:t>
             </a:r>
           </a:p>
         </p:txBody>
       </p:sp>
-      <p:sp>
-        <p:nvSpPr>
-          <p:cNvPr id="28" name="TextBox 27"/>
+      <p:pic>
+        <p:nvPicPr>
+          <p:cNvPr id="32" name="Picture 31" descr="image.png"/>
+          <p:cNvPicPr>
+            <a:picLocks noChangeAspect="1"/>
+          </p:cNvPicPr>
+          <p:nvPr/>
+        </p:nvPicPr>
+        <p:blipFill>
+          <a:blip r:embed="rId16"/>
+          <a:stretch>
+            <a:fillRect/>
+          </a:stretch>
+        </p:blipFill>
+        <p:spPr>
+          <a:xfrm>
+            <a:off x="8046720" y="4315968"/>
+            <a:ext cx="685800" cy="685800"/>
+          </a:xfrm>
+          <a:prstGeom prst="rect">
+            <a:avLst/>
+          </a:prstGeom>
+        </p:spPr>
+      </p:pic>
+      <p:sp>
+        <p:nvSpPr>
+          <p:cNvPr id="33" name="TextBox 32"/>
           <p:cNvSpPr txBox="1"/>
           <p:nvPr/>
         </p:nvSpPr>
         <p:spPr>
           <a:xfrm>
             <a:off x="2697480" y="4718304"/>
-            <a:ext cx="6035040" cy="292608"/>
+            <a:ext cx="5212080" cy="292608"/>
           </a:xfrm>
           <a:prstGeom prst="rect">
             <a:avLst/>
@@ -6017,7 +6375,7 @@
         <p:spPr>
           <a:xfrm>
             <a:off x="2697480" y="786384"/>
-            <a:ext cx="6035040" cy="347472"/>
+            <a:ext cx="5212080" cy="347472"/>
           </a:xfrm>
           <a:prstGeom prst="rect">
             <a:avLst/>
@@ -6044,16 +6402,40 @@
           </a:p>
         </p:txBody>
       </p:sp>
-      <p:sp>
-        <p:nvSpPr>
-          <p:cNvPr id="8" name="TextBox 7"/>
+      <p:pic>
+        <p:nvPicPr>
+          <p:cNvPr id="8" name="Picture 7" descr="image.png"/>
+          <p:cNvPicPr>
+            <a:picLocks noChangeAspect="1"/>
+          </p:cNvPicPr>
+          <p:nvPr/>
+        </p:nvPicPr>
+        <p:blipFill>
+          <a:blip r:embed="rId4"/>
+          <a:stretch>
+            <a:fillRect/>
+          </a:stretch>
+        </p:blipFill>
+        <p:spPr>
+          <a:xfrm>
+            <a:off x="8046720" y="804672"/>
+            <a:ext cx="685800" cy="685800"/>
+          </a:xfrm>
+          <a:prstGeom prst="rect">
+            <a:avLst/>
+          </a:prstGeom>
+        </p:spPr>
+      </p:pic>
+      <p:sp>
+        <p:nvSpPr>
+          <p:cNvPr id="9" name="TextBox 8"/>
           <p:cNvSpPr txBox="1"/>
           <p:nvPr/>
         </p:nvSpPr>
         <p:spPr>
           <a:xfrm>
             <a:off x="2697480" y="1207008"/>
-            <a:ext cx="6035040" cy="292608"/>
+            <a:ext cx="5212080" cy="292608"/>
           </a:xfrm>
           <a:prstGeom prst="rect">
             <a:avLst/>
@@ -6081,7 +6463,7 @@
       </p:sp>
       <p:sp>
         <p:nvSpPr>
-          <p:cNvPr id="9" name="Rectangle 8"/>
+          <p:cNvPr id="10" name="Rectangle 9"/>
           <p:cNvSpPr/>
           <p:nvPr/>
         </p:nvSpPr>
@@ -6126,14 +6508,14 @@
       </p:sp>
       <p:pic>
         <p:nvPicPr>
-          <p:cNvPr id="10" name="Picture 9" descr="image.jpg"/>
+          <p:cNvPr id="11" name="Picture 10" descr="image.jpg"/>
           <p:cNvPicPr>
             <a:picLocks noChangeAspect="1"/>
           </p:cNvPicPr>
           <p:nvPr/>
         </p:nvPicPr>
         <p:blipFill>
-          <a:blip r:embed="rId4"/>
+          <a:blip r:embed="rId5"/>
           <a:stretch>
             <a:fillRect/>
           </a:stretch>
@@ -6150,7 +6532,7 @@
       </p:pic>
       <p:sp>
         <p:nvSpPr>
-          <p:cNvPr id="11" name="TextBox 10"/>
+          <p:cNvPr id="12" name="TextBox 11"/>
           <p:cNvSpPr txBox="1"/>
           <p:nvPr/>
         </p:nvSpPr>
@@ -6185,14 +6567,14 @@
       </p:sp>
       <p:sp>
         <p:nvSpPr>
-          <p:cNvPr id="12" name="TextBox 11"/>
+          <p:cNvPr id="13" name="TextBox 12"/>
           <p:cNvSpPr txBox="1"/>
           <p:nvPr/>
         </p:nvSpPr>
         <p:spPr>
           <a:xfrm>
             <a:off x="2697480" y="1664208"/>
-            <a:ext cx="6035040" cy="347472"/>
+            <a:ext cx="5212080" cy="347472"/>
           </a:xfrm>
           <a:prstGeom prst="rect">
             <a:avLst/>
@@ -6212,23 +6594,47 @@
                   <a:srgbClr val="FFFFFF"/>
                 </a:solidFill>
                 <a:latin typeface="Arial"/>
-                <a:hlinkClick r:id="rId5"/>
+                <a:hlinkClick r:id="rId6"/>
               </a:rPr>
               <a:t>赤ちゃん・子供向け 知育アニメ★数字をおぼえよう・アイスクリーム★Learn To …</a:t>
             </a:r>
           </a:p>
         </p:txBody>
       </p:sp>
-      <p:sp>
-        <p:nvSpPr>
-          <p:cNvPr id="13" name="TextBox 12"/>
+      <p:pic>
+        <p:nvPicPr>
+          <p:cNvPr id="14" name="Picture 13" descr="image.png"/>
+          <p:cNvPicPr>
+            <a:picLocks noChangeAspect="1"/>
+          </p:cNvPicPr>
+          <p:nvPr/>
+        </p:nvPicPr>
+        <p:blipFill>
+          <a:blip r:embed="rId7"/>
+          <a:stretch>
+            <a:fillRect/>
+          </a:stretch>
+        </p:blipFill>
+        <p:spPr>
+          <a:xfrm>
+            <a:off x="8046720" y="1682496"/>
+            <a:ext cx="685800" cy="685800"/>
+          </a:xfrm>
+          <a:prstGeom prst="rect">
+            <a:avLst/>
+          </a:prstGeom>
+        </p:spPr>
+      </p:pic>
+      <p:sp>
+        <p:nvSpPr>
+          <p:cNvPr id="15" name="TextBox 14"/>
           <p:cNvSpPr txBox="1"/>
           <p:nvPr/>
         </p:nvSpPr>
         <p:spPr>
           <a:xfrm>
             <a:off x="2697480" y="2084832"/>
-            <a:ext cx="6035040" cy="292608"/>
+            <a:ext cx="5212080" cy="292608"/>
           </a:xfrm>
           <a:prstGeom prst="rect">
             <a:avLst/>
@@ -6256,7 +6662,7 @@
       </p:sp>
       <p:sp>
         <p:nvSpPr>
-          <p:cNvPr id="14" name="Rectangle 13"/>
+          <p:cNvPr id="16" name="Rectangle 15"/>
           <p:cNvSpPr/>
           <p:nvPr/>
         </p:nvSpPr>
@@ -6301,14 +6707,14 @@
       </p:sp>
       <p:pic>
         <p:nvPicPr>
-          <p:cNvPr id="15" name="Picture 14" descr="image.jpg"/>
+          <p:cNvPr id="17" name="Picture 16" descr="image.jpg"/>
           <p:cNvPicPr>
             <a:picLocks noChangeAspect="1"/>
           </p:cNvPicPr>
           <p:nvPr/>
         </p:nvPicPr>
         <p:blipFill>
-          <a:blip r:embed="rId6"/>
+          <a:blip r:embed="rId8"/>
           <a:stretch>
             <a:fillRect/>
           </a:stretch>
@@ -6325,7 +6731,7 @@
       </p:pic>
       <p:sp>
         <p:nvSpPr>
-          <p:cNvPr id="16" name="TextBox 15"/>
+          <p:cNvPr id="18" name="TextBox 17"/>
           <p:cNvSpPr txBox="1"/>
           <p:nvPr/>
         </p:nvSpPr>
@@ -6360,14 +6766,14 @@
       </p:sp>
       <p:sp>
         <p:nvSpPr>
-          <p:cNvPr id="17" name="TextBox 16"/>
+          <p:cNvPr id="19" name="TextBox 18"/>
           <p:cNvSpPr txBox="1"/>
           <p:nvPr/>
         </p:nvSpPr>
         <p:spPr>
           <a:xfrm>
             <a:off x="2697480" y="2542032"/>
-            <a:ext cx="6035040" cy="347472"/>
+            <a:ext cx="5212080" cy="347472"/>
           </a:xfrm>
           <a:prstGeom prst="rect">
             <a:avLst/>
@@ -6387,23 +6793,47 @@
                   <a:srgbClr val="FFFFFF"/>
                 </a:solidFill>
                 <a:latin typeface="Arial"/>
-                <a:hlinkClick r:id="rId7"/>
+                <a:hlinkClick r:id="rId9"/>
               </a:rPr>
               <a:t>TVアニメ『呪術廻戦』第2期「懐玉・玉折」ノンクレジットOPムービー／OPテーマ：キ…</a:t>
             </a:r>
           </a:p>
         </p:txBody>
       </p:sp>
-      <p:sp>
-        <p:nvSpPr>
-          <p:cNvPr id="18" name="TextBox 17"/>
+      <p:pic>
+        <p:nvPicPr>
+          <p:cNvPr id="20" name="Picture 19" descr="image.png"/>
+          <p:cNvPicPr>
+            <a:picLocks noChangeAspect="1"/>
+          </p:cNvPicPr>
+          <p:nvPr/>
+        </p:nvPicPr>
+        <p:blipFill>
+          <a:blip r:embed="rId10"/>
+          <a:stretch>
+            <a:fillRect/>
+          </a:stretch>
+        </p:blipFill>
+        <p:spPr>
+          <a:xfrm>
+            <a:off x="8046720" y="2560320"/>
+            <a:ext cx="685800" cy="685800"/>
+          </a:xfrm>
+          <a:prstGeom prst="rect">
+            <a:avLst/>
+          </a:prstGeom>
+        </p:spPr>
+      </p:pic>
+      <p:sp>
+        <p:nvSpPr>
+          <p:cNvPr id="21" name="TextBox 20"/>
           <p:cNvSpPr txBox="1"/>
           <p:nvPr/>
         </p:nvSpPr>
         <p:spPr>
           <a:xfrm>
             <a:off x="2697480" y="2962656"/>
-            <a:ext cx="6035040" cy="292608"/>
+            <a:ext cx="5212080" cy="292608"/>
           </a:xfrm>
           <a:prstGeom prst="rect">
             <a:avLst/>
@@ -6431,7 +6861,7 @@
       </p:sp>
       <p:sp>
         <p:nvSpPr>
-          <p:cNvPr id="19" name="Rectangle 18"/>
+          <p:cNvPr id="22" name="Rectangle 21"/>
           <p:cNvSpPr/>
           <p:nvPr/>
         </p:nvSpPr>
@@ -6476,14 +6906,14 @@
       </p:sp>
       <p:pic>
         <p:nvPicPr>
-          <p:cNvPr id="20" name="Picture 19" descr="image.jpg"/>
+          <p:cNvPr id="23" name="Picture 22" descr="image.jpg"/>
           <p:cNvPicPr>
             <a:picLocks noChangeAspect="1"/>
           </p:cNvPicPr>
           <p:nvPr/>
         </p:nvPicPr>
         <p:blipFill>
-          <a:blip r:embed="rId8"/>
+          <a:blip r:embed="rId11"/>
           <a:stretch>
             <a:fillRect/>
           </a:stretch>
@@ -6500,7 +6930,7 @@
       </p:pic>
       <p:sp>
         <p:nvSpPr>
-          <p:cNvPr id="21" name="TextBox 20"/>
+          <p:cNvPr id="24" name="TextBox 23"/>
           <p:cNvSpPr txBox="1"/>
           <p:nvPr/>
         </p:nvSpPr>
@@ -6535,14 +6965,14 @@
       </p:sp>
       <p:sp>
         <p:nvSpPr>
-          <p:cNvPr id="22" name="TextBox 21"/>
+          <p:cNvPr id="25" name="TextBox 24"/>
           <p:cNvSpPr txBox="1"/>
           <p:nvPr/>
         </p:nvSpPr>
         <p:spPr>
           <a:xfrm>
             <a:off x="2697480" y="3419856"/>
-            <a:ext cx="6035040" cy="347472"/>
+            <a:ext cx="5212080" cy="347472"/>
           </a:xfrm>
           <a:prstGeom prst="rect">
             <a:avLst/>
@@ -6562,23 +6992,47 @@
                   <a:srgbClr val="FFFFFF"/>
                 </a:solidFill>
                 <a:latin typeface="Arial"/>
-                <a:hlinkClick r:id="rId9"/>
+                <a:hlinkClick r:id="rId12"/>
               </a:rPr>
               <a:t>Mrs. GREEN APPLE「ライラック」MV - TVアニメ『忘却バッテリー』…</a:t>
             </a:r>
           </a:p>
         </p:txBody>
       </p:sp>
-      <p:sp>
-        <p:nvSpPr>
-          <p:cNvPr id="23" name="TextBox 22"/>
+      <p:pic>
+        <p:nvPicPr>
+          <p:cNvPr id="26" name="Picture 25" descr="image.png"/>
+          <p:cNvPicPr>
+            <a:picLocks noChangeAspect="1"/>
+          </p:cNvPicPr>
+          <p:nvPr/>
+        </p:nvPicPr>
+        <p:blipFill>
+          <a:blip r:embed="rId13"/>
+          <a:stretch>
+            <a:fillRect/>
+          </a:stretch>
+        </p:blipFill>
+        <p:spPr>
+          <a:xfrm>
+            <a:off x="8046720" y="3438144"/>
+            <a:ext cx="685800" cy="685800"/>
+          </a:xfrm>
+          <a:prstGeom prst="rect">
+            <a:avLst/>
+          </a:prstGeom>
+        </p:spPr>
+      </p:pic>
+      <p:sp>
+        <p:nvSpPr>
+          <p:cNvPr id="27" name="TextBox 26"/>
           <p:cNvSpPr txBox="1"/>
           <p:nvPr/>
         </p:nvSpPr>
         <p:spPr>
           <a:xfrm>
             <a:off x="2697480" y="3840480"/>
-            <a:ext cx="6035040" cy="292608"/>
+            <a:ext cx="5212080" cy="292608"/>
           </a:xfrm>
           <a:prstGeom prst="rect">
             <a:avLst/>
@@ -6606,7 +7060,7 @@
       </p:sp>
       <p:sp>
         <p:nvSpPr>
-          <p:cNvPr id="24" name="Rectangle 23"/>
+          <p:cNvPr id="28" name="Rectangle 27"/>
           <p:cNvSpPr/>
           <p:nvPr/>
         </p:nvSpPr>
@@ -6651,14 +7105,14 @@
       </p:sp>
       <p:pic>
         <p:nvPicPr>
-          <p:cNvPr id="25" name="Picture 24" descr="image.jpg"/>
+          <p:cNvPr id="29" name="Picture 28" descr="image.jpg"/>
           <p:cNvPicPr>
             <a:picLocks noChangeAspect="1"/>
           </p:cNvPicPr>
           <p:nvPr/>
         </p:nvPicPr>
         <p:blipFill>
-          <a:blip r:embed="rId10"/>
+          <a:blip r:embed="rId14"/>
           <a:stretch>
             <a:fillRect/>
           </a:stretch>
@@ -6675,7 +7129,7 @@
       </p:pic>
       <p:sp>
         <p:nvSpPr>
-          <p:cNvPr id="26" name="TextBox 25"/>
+          <p:cNvPr id="30" name="TextBox 29"/>
           <p:cNvSpPr txBox="1"/>
           <p:nvPr/>
         </p:nvSpPr>
@@ -6710,14 +7164,14 @@
       </p:sp>
       <p:sp>
         <p:nvSpPr>
-          <p:cNvPr id="27" name="TextBox 26"/>
+          <p:cNvPr id="31" name="TextBox 30"/>
           <p:cNvSpPr txBox="1"/>
           <p:nvPr/>
         </p:nvSpPr>
         <p:spPr>
           <a:xfrm>
             <a:off x="2697480" y="4297680"/>
-            <a:ext cx="6035040" cy="347472"/>
+            <a:ext cx="5212080" cy="347472"/>
           </a:xfrm>
           <a:prstGeom prst="rect">
             <a:avLst/>
@@ -6737,23 +7191,47 @@
                   <a:srgbClr val="FFFFFF"/>
                 </a:solidFill>
                 <a:latin typeface="Arial"/>
-                <a:hlinkClick r:id="rId11"/>
+                <a:hlinkClick r:id="rId15"/>
               </a:rPr>
               <a:t>アイナ・ジ・エンド / 革命道中 - On The Way × TVアニメ『ダンダダ…</a:t>
             </a:r>
           </a:p>
         </p:txBody>
       </p:sp>
-      <p:sp>
-        <p:nvSpPr>
-          <p:cNvPr id="28" name="TextBox 27"/>
+      <p:pic>
+        <p:nvPicPr>
+          <p:cNvPr id="32" name="Picture 31" descr="image.png"/>
+          <p:cNvPicPr>
+            <a:picLocks noChangeAspect="1"/>
+          </p:cNvPicPr>
+          <p:nvPr/>
+        </p:nvPicPr>
+        <p:blipFill>
+          <a:blip r:embed="rId16"/>
+          <a:stretch>
+            <a:fillRect/>
+          </a:stretch>
+        </p:blipFill>
+        <p:spPr>
+          <a:xfrm>
+            <a:off x="8046720" y="4315968"/>
+            <a:ext cx="685800" cy="685800"/>
+          </a:xfrm>
+          <a:prstGeom prst="rect">
+            <a:avLst/>
+          </a:prstGeom>
+        </p:spPr>
+      </p:pic>
+      <p:sp>
+        <p:nvSpPr>
+          <p:cNvPr id="33" name="TextBox 32"/>
           <p:cNvSpPr txBox="1"/>
           <p:nvPr/>
         </p:nvSpPr>
         <p:spPr>
           <a:xfrm>
             <a:off x="2697480" y="4718304"/>
-            <a:ext cx="6035040" cy="292608"/>
+            <a:ext cx="5212080" cy="292608"/>
           </a:xfrm>
           <a:prstGeom prst="rect">
             <a:avLst/>
@@ -6988,7 +7466,7 @@
         <p:spPr>
           <a:xfrm>
             <a:off x="2697480" y="786384"/>
-            <a:ext cx="6035040" cy="347472"/>
+            <a:ext cx="5212080" cy="347472"/>
           </a:xfrm>
           <a:prstGeom prst="rect">
             <a:avLst/>
@@ -7015,16 +7493,40 @@
           </a:p>
         </p:txBody>
       </p:sp>
-      <p:sp>
-        <p:nvSpPr>
-          <p:cNvPr id="8" name="TextBox 7"/>
+      <p:pic>
+        <p:nvPicPr>
+          <p:cNvPr id="8" name="Picture 7" descr="image.png"/>
+          <p:cNvPicPr>
+            <a:picLocks noChangeAspect="1"/>
+          </p:cNvPicPr>
+          <p:nvPr/>
+        </p:nvPicPr>
+        <p:blipFill>
+          <a:blip r:embed="rId4"/>
+          <a:stretch>
+            <a:fillRect/>
+          </a:stretch>
+        </p:blipFill>
+        <p:spPr>
+          <a:xfrm>
+            <a:off x="8046720" y="804672"/>
+            <a:ext cx="685800" cy="685800"/>
+          </a:xfrm>
+          <a:prstGeom prst="rect">
+            <a:avLst/>
+          </a:prstGeom>
+        </p:spPr>
+      </p:pic>
+      <p:sp>
+        <p:nvSpPr>
+          <p:cNvPr id="9" name="TextBox 8"/>
           <p:cNvSpPr txBox="1"/>
           <p:nvPr/>
         </p:nvSpPr>
         <p:spPr>
           <a:xfrm>
             <a:off x="2697480" y="1207008"/>
-            <a:ext cx="6035040" cy="292608"/>
+            <a:ext cx="5212080" cy="292608"/>
           </a:xfrm>
           <a:prstGeom prst="rect">
             <a:avLst/>
@@ -7052,7 +7554,7 @@
       </p:sp>
       <p:sp>
         <p:nvSpPr>
-          <p:cNvPr id="9" name="Rectangle 8"/>
+          <p:cNvPr id="10" name="Rectangle 9"/>
           <p:cNvSpPr/>
           <p:nvPr/>
         </p:nvSpPr>
@@ -7097,14 +7599,14 @@
       </p:sp>
       <p:pic>
         <p:nvPicPr>
-          <p:cNvPr id="10" name="Picture 9" descr="image.jpg"/>
+          <p:cNvPr id="11" name="Picture 10" descr="image.jpg"/>
           <p:cNvPicPr>
             <a:picLocks noChangeAspect="1"/>
           </p:cNvPicPr>
           <p:nvPr/>
         </p:nvPicPr>
         <p:blipFill>
-          <a:blip r:embed="rId4"/>
+          <a:blip r:embed="rId5"/>
           <a:stretch>
             <a:fillRect/>
           </a:stretch>
@@ -7121,7 +7623,7 @@
       </p:pic>
       <p:sp>
         <p:nvSpPr>
-          <p:cNvPr id="11" name="TextBox 10"/>
+          <p:cNvPr id="12" name="TextBox 11"/>
           <p:cNvSpPr txBox="1"/>
           <p:nvPr/>
         </p:nvSpPr>
@@ -7156,14 +7658,14 @@
       </p:sp>
       <p:sp>
         <p:nvSpPr>
-          <p:cNvPr id="12" name="TextBox 11"/>
+          <p:cNvPr id="13" name="TextBox 12"/>
           <p:cNvSpPr txBox="1"/>
           <p:nvPr/>
         </p:nvSpPr>
         <p:spPr>
           <a:xfrm>
             <a:off x="2697480" y="1664208"/>
-            <a:ext cx="6035040" cy="347472"/>
+            <a:ext cx="5212080" cy="347472"/>
           </a:xfrm>
           <a:prstGeom prst="rect">
             <a:avLst/>
@@ -7183,23 +7685,47 @@
                   <a:srgbClr val="FFFFFF"/>
                 </a:solidFill>
                 <a:latin typeface="Arial"/>
-                <a:hlinkClick r:id="rId5"/>
+                <a:hlinkClick r:id="rId6"/>
               </a:rPr>
               <a:t>市川團十郎が語る映画「国宝」の率直な感想と歌舞伎への想い</a:t>
             </a:r>
           </a:p>
         </p:txBody>
       </p:sp>
-      <p:sp>
-        <p:nvSpPr>
-          <p:cNvPr id="13" name="TextBox 12"/>
+      <p:pic>
+        <p:nvPicPr>
+          <p:cNvPr id="14" name="Picture 13" descr="image.png"/>
+          <p:cNvPicPr>
+            <a:picLocks noChangeAspect="1"/>
+          </p:cNvPicPr>
+          <p:nvPr/>
+        </p:nvPicPr>
+        <p:blipFill>
+          <a:blip r:embed="rId7"/>
+          <a:stretch>
+            <a:fillRect/>
+          </a:stretch>
+        </p:blipFill>
+        <p:spPr>
+          <a:xfrm>
+            <a:off x="8046720" y="1682496"/>
+            <a:ext cx="685800" cy="685800"/>
+          </a:xfrm>
+          <a:prstGeom prst="rect">
+            <a:avLst/>
+          </a:prstGeom>
+        </p:spPr>
+      </p:pic>
+      <p:sp>
+        <p:nvSpPr>
+          <p:cNvPr id="15" name="TextBox 14"/>
           <p:cNvSpPr txBox="1"/>
           <p:nvPr/>
         </p:nvSpPr>
         <p:spPr>
           <a:xfrm>
             <a:off x="2697480" y="2084832"/>
-            <a:ext cx="6035040" cy="292608"/>
+            <a:ext cx="5212080" cy="292608"/>
           </a:xfrm>
           <a:prstGeom prst="rect">
             <a:avLst/>
@@ -7227,7 +7753,7 @@
       </p:sp>
       <p:sp>
         <p:nvSpPr>
-          <p:cNvPr id="14" name="Rectangle 13"/>
+          <p:cNvPr id="16" name="Rectangle 15"/>
           <p:cNvSpPr/>
           <p:nvPr/>
         </p:nvSpPr>
@@ -7272,14 +7798,14 @@
       </p:sp>
       <p:pic>
         <p:nvPicPr>
-          <p:cNvPr id="15" name="Picture 14" descr="image.jpg"/>
+          <p:cNvPr id="17" name="Picture 16" descr="image.jpg"/>
           <p:cNvPicPr>
             <a:picLocks noChangeAspect="1"/>
           </p:cNvPicPr>
           <p:nvPr/>
         </p:nvPicPr>
         <p:blipFill>
-          <a:blip r:embed="rId6"/>
+          <a:blip r:embed="rId8"/>
           <a:stretch>
             <a:fillRect/>
           </a:stretch>
@@ -7296,7 +7822,7 @@
       </p:pic>
       <p:sp>
         <p:nvSpPr>
-          <p:cNvPr id="16" name="TextBox 15"/>
+          <p:cNvPr id="18" name="TextBox 17"/>
           <p:cNvSpPr txBox="1"/>
           <p:nvPr/>
         </p:nvSpPr>
@@ -7331,14 +7857,14 @@
       </p:sp>
       <p:sp>
         <p:nvSpPr>
-          <p:cNvPr id="17" name="TextBox 16"/>
+          <p:cNvPr id="19" name="TextBox 18"/>
           <p:cNvSpPr txBox="1"/>
           <p:nvPr/>
         </p:nvSpPr>
         <p:spPr>
           <a:xfrm>
             <a:off x="2697480" y="2542032"/>
-            <a:ext cx="6035040" cy="347472"/>
+            <a:ext cx="5212080" cy="347472"/>
           </a:xfrm>
           <a:prstGeom prst="rect">
             <a:avLst/>
@@ -7358,23 +7884,47 @@
                   <a:srgbClr val="FFFFFF"/>
                 </a:solidFill>
                 <a:latin typeface="Arial"/>
-                <a:hlinkClick r:id="rId7"/>
+                <a:hlinkClick r:id="rId9"/>
               </a:rPr>
               <a:t>名作映画を見た感想を嘘ついてる奴は誰だ！映画人狼バトル開始！</a:t>
             </a:r>
           </a:p>
         </p:txBody>
       </p:sp>
-      <p:sp>
-        <p:nvSpPr>
-          <p:cNvPr id="18" name="TextBox 17"/>
+      <p:pic>
+        <p:nvPicPr>
+          <p:cNvPr id="20" name="Picture 19" descr="image.png"/>
+          <p:cNvPicPr>
+            <a:picLocks noChangeAspect="1"/>
+          </p:cNvPicPr>
+          <p:nvPr/>
+        </p:nvPicPr>
+        <p:blipFill>
+          <a:blip r:embed="rId10"/>
+          <a:stretch>
+            <a:fillRect/>
+          </a:stretch>
+        </p:blipFill>
+        <p:spPr>
+          <a:xfrm>
+            <a:off x="8046720" y="2560320"/>
+            <a:ext cx="685800" cy="685800"/>
+          </a:xfrm>
+          <a:prstGeom prst="rect">
+            <a:avLst/>
+          </a:prstGeom>
+        </p:spPr>
+      </p:pic>
+      <p:sp>
+        <p:nvSpPr>
+          <p:cNvPr id="21" name="TextBox 20"/>
           <p:cNvSpPr txBox="1"/>
           <p:nvPr/>
         </p:nvSpPr>
         <p:spPr>
           <a:xfrm>
             <a:off x="2697480" y="2962656"/>
-            <a:ext cx="6035040" cy="292608"/>
+            <a:ext cx="5212080" cy="292608"/>
           </a:xfrm>
           <a:prstGeom prst="rect">
             <a:avLst/>
@@ -7402,7 +7952,7 @@
       </p:sp>
       <p:sp>
         <p:nvSpPr>
-          <p:cNvPr id="19" name="Rectangle 18"/>
+          <p:cNvPr id="22" name="Rectangle 21"/>
           <p:cNvSpPr/>
           <p:nvPr/>
         </p:nvSpPr>
@@ -7447,14 +7997,14 @@
       </p:sp>
       <p:pic>
         <p:nvPicPr>
-          <p:cNvPr id="20" name="Picture 19" descr="image.jpg"/>
+          <p:cNvPr id="23" name="Picture 22" descr="image.jpg"/>
           <p:cNvPicPr>
             <a:picLocks noChangeAspect="1"/>
           </p:cNvPicPr>
           <p:nvPr/>
         </p:nvPicPr>
         <p:blipFill>
-          <a:blip r:embed="rId8"/>
+          <a:blip r:embed="rId11"/>
           <a:stretch>
             <a:fillRect/>
           </a:stretch>
@@ -7471,7 +8021,7 @@
       </p:pic>
       <p:sp>
         <p:nvSpPr>
-          <p:cNvPr id="21" name="TextBox 20"/>
+          <p:cNvPr id="24" name="TextBox 23"/>
           <p:cNvSpPr txBox="1"/>
           <p:nvPr/>
         </p:nvSpPr>
@@ -7506,14 +8056,14 @@
       </p:sp>
       <p:sp>
         <p:nvSpPr>
-          <p:cNvPr id="22" name="TextBox 21"/>
+          <p:cNvPr id="25" name="TextBox 24"/>
           <p:cNvSpPr txBox="1"/>
           <p:nvPr/>
         </p:nvSpPr>
         <p:spPr>
           <a:xfrm>
             <a:off x="2697480" y="3419856"/>
-            <a:ext cx="6035040" cy="347472"/>
+            <a:ext cx="5212080" cy="347472"/>
           </a:xfrm>
           <a:prstGeom prst="rect">
             <a:avLst/>
@@ -7533,23 +8083,47 @@
                   <a:srgbClr val="FFFFFF"/>
                 </a:solidFill>
                 <a:latin typeface="Arial"/>
-                <a:hlinkClick r:id="rId9"/>
+                <a:hlinkClick r:id="rId12"/>
               </a:rPr>
               <a:t>ディズニー１００周年のゴミ『ウィッシュ』レビュー</a:t>
             </a:r>
           </a:p>
         </p:txBody>
       </p:sp>
-      <p:sp>
-        <p:nvSpPr>
-          <p:cNvPr id="23" name="TextBox 22"/>
+      <p:pic>
+        <p:nvPicPr>
+          <p:cNvPr id="26" name="Picture 25" descr="image.png"/>
+          <p:cNvPicPr>
+            <a:picLocks noChangeAspect="1"/>
+          </p:cNvPicPr>
+          <p:nvPr/>
+        </p:nvPicPr>
+        <p:blipFill>
+          <a:blip r:embed="rId13"/>
+          <a:stretch>
+            <a:fillRect/>
+          </a:stretch>
+        </p:blipFill>
+        <p:spPr>
+          <a:xfrm>
+            <a:off x="8046720" y="3438144"/>
+            <a:ext cx="685800" cy="685800"/>
+          </a:xfrm>
+          <a:prstGeom prst="rect">
+            <a:avLst/>
+          </a:prstGeom>
+        </p:spPr>
+      </p:pic>
+      <p:sp>
+        <p:nvSpPr>
+          <p:cNvPr id="27" name="TextBox 26"/>
           <p:cNvSpPr txBox="1"/>
           <p:nvPr/>
         </p:nvSpPr>
         <p:spPr>
           <a:xfrm>
             <a:off x="2697480" y="3840480"/>
-            <a:ext cx="6035040" cy="292608"/>
+            <a:ext cx="5212080" cy="292608"/>
           </a:xfrm>
           <a:prstGeom prst="rect">
             <a:avLst/>
@@ -7577,7 +8151,7 @@
       </p:sp>
       <p:sp>
         <p:nvSpPr>
-          <p:cNvPr id="24" name="Rectangle 23"/>
+          <p:cNvPr id="28" name="Rectangle 27"/>
           <p:cNvSpPr/>
           <p:nvPr/>
         </p:nvSpPr>
@@ -7622,14 +8196,14 @@
       </p:sp>
       <p:pic>
         <p:nvPicPr>
-          <p:cNvPr id="25" name="Picture 24" descr="image.jpg"/>
+          <p:cNvPr id="29" name="Picture 28" descr="image.jpg"/>
           <p:cNvPicPr>
             <a:picLocks noChangeAspect="1"/>
           </p:cNvPicPr>
           <p:nvPr/>
         </p:nvPicPr>
         <p:blipFill>
-          <a:blip r:embed="rId10"/>
+          <a:blip r:embed="rId14"/>
           <a:stretch>
             <a:fillRect/>
           </a:stretch>
@@ -7646,7 +8220,7 @@
       </p:pic>
       <p:sp>
         <p:nvSpPr>
-          <p:cNvPr id="26" name="TextBox 25"/>
+          <p:cNvPr id="30" name="TextBox 29"/>
           <p:cNvSpPr txBox="1"/>
           <p:nvPr/>
         </p:nvSpPr>
@@ -7681,14 +8255,14 @@
       </p:sp>
       <p:sp>
         <p:nvSpPr>
-          <p:cNvPr id="27" name="TextBox 26"/>
+          <p:cNvPr id="31" name="TextBox 30"/>
           <p:cNvSpPr txBox="1"/>
           <p:nvPr/>
         </p:nvSpPr>
         <p:spPr>
           <a:xfrm>
             <a:off x="2697480" y="4297680"/>
-            <a:ext cx="6035040" cy="347472"/>
+            <a:ext cx="5212080" cy="347472"/>
           </a:xfrm>
           <a:prstGeom prst="rect">
             <a:avLst/>
@@ -7708,23 +8282,47 @@
                   <a:srgbClr val="FFFFFF"/>
                 </a:solidFill>
                 <a:latin typeface="Arial"/>
-                <a:hlinkClick r:id="rId11"/>
+                <a:hlinkClick r:id="rId15"/>
               </a:rPr>
               <a:t>【2ch有益スレ】今まで見た映画の中で「一番最悪だった映画」挙げてけｗ</a:t>
             </a:r>
           </a:p>
         </p:txBody>
       </p:sp>
-      <p:sp>
-        <p:nvSpPr>
-          <p:cNvPr id="28" name="TextBox 27"/>
+      <p:pic>
+        <p:nvPicPr>
+          <p:cNvPr id="32" name="Picture 31" descr="image.png"/>
+          <p:cNvPicPr>
+            <a:picLocks noChangeAspect="1"/>
+          </p:cNvPicPr>
+          <p:nvPr/>
+        </p:nvPicPr>
+        <p:blipFill>
+          <a:blip r:embed="rId16"/>
+          <a:stretch>
+            <a:fillRect/>
+          </a:stretch>
+        </p:blipFill>
+        <p:spPr>
+          <a:xfrm>
+            <a:off x="8046720" y="4315968"/>
+            <a:ext cx="685800" cy="685800"/>
+          </a:xfrm>
+          <a:prstGeom prst="rect">
+            <a:avLst/>
+          </a:prstGeom>
+        </p:spPr>
+      </p:pic>
+      <p:sp>
+        <p:nvSpPr>
+          <p:cNvPr id="33" name="TextBox 32"/>
           <p:cNvSpPr txBox="1"/>
           <p:nvPr/>
         </p:nvSpPr>
         <p:spPr>
           <a:xfrm>
             <a:off x="2697480" y="4718304"/>
-            <a:ext cx="6035040" cy="292608"/>
+            <a:ext cx="5212080" cy="292608"/>
           </a:xfrm>
           <a:prstGeom prst="rect">
             <a:avLst/>
@@ -7863,23 +8461,82 @@
         <p:spPr>
           <a:xfrm>
             <a:off x="320040" y="960120"/>
-            <a:ext cx="4389120" cy="2468880"/>
+            <a:ext cx="3657600" cy="2057400"/>
           </a:xfrm>
           <a:prstGeom prst="rect">
             <a:avLst/>
           </a:prstGeom>
         </p:spPr>
       </p:pic>
-      <p:sp>
-        <p:nvSpPr>
-          <p:cNvPr id="5" name="TextBox 4"/>
-          <p:cNvSpPr txBox="1"/>
-          <p:nvPr/>
-        </p:nvSpPr>
-        <p:spPr>
-          <a:xfrm>
-            <a:off x="4937760" y="777240"/>
-            <a:ext cx="3931920" cy="1463040"/>
+      <p:pic>
+        <p:nvPicPr>
+          <p:cNvPr id="5" name="Picture 4" descr="image.png"/>
+          <p:cNvPicPr>
+            <a:picLocks noChangeAspect="1"/>
+          </p:cNvPicPr>
+          <p:nvPr/>
+        </p:nvPicPr>
+        <p:blipFill>
+          <a:blip r:embed="rId3"/>
+          <a:stretch>
+            <a:fillRect/>
+          </a:stretch>
+        </p:blipFill>
+        <p:spPr>
+          <a:xfrm>
+            <a:off x="320040" y="3090672"/>
+            <a:ext cx="1005840" cy="1005840"/>
+          </a:xfrm>
+          <a:prstGeom prst="rect">
+            <a:avLst/>
+          </a:prstGeom>
+        </p:spPr>
+      </p:pic>
+      <p:sp>
+        <p:nvSpPr>
+          <p:cNvPr id="6" name="TextBox 5"/>
+          <p:cNvSpPr txBox="1"/>
+          <p:nvPr/>
+        </p:nvSpPr>
+        <p:spPr>
+          <a:xfrm>
+            <a:off x="1417320" y="3246120"/>
+            <a:ext cx="2606040" cy="365760"/>
+          </a:xfrm>
+          <a:prstGeom prst="rect">
+            <a:avLst/>
+          </a:prstGeom>
+          <a:noFill/>
+        </p:spPr>
+        <p:txBody>
+          <a:bodyPr wrap="none">
+            <a:spAutoFit/>
+          </a:bodyPr>
+          <a:lstStyle/>
+          <a:p>
+            <a:pPr algn="l"/>
+            <a:r>
+              <a:rPr sz="700" b="0">
+                <a:solidFill>
+                  <a:srgbClr val="AAAAAA"/>
+                </a:solidFill>
+                <a:latin typeface="Arial"/>
+              </a:rPr>
+              <a:t>https://www.youtube.com/watch?v=adE8jVLoLPo</a:t>
+            </a:r>
+          </a:p>
+        </p:txBody>
+      </p:sp>
+      <p:sp>
+        <p:nvSpPr>
+          <p:cNvPr id="7" name="TextBox 6"/>
+          <p:cNvSpPr txBox="1"/>
+          <p:nvPr/>
+        </p:nvSpPr>
+        <p:spPr>
+          <a:xfrm>
+            <a:off x="4160520" y="777240"/>
+            <a:ext cx="4663440" cy="1463040"/>
           </a:xfrm>
           <a:prstGeom prst="rect">
             <a:avLst/>
@@ -7899,7 +8556,7 @@
                   <a:srgbClr val="FFFFFF"/>
                 </a:solidFill>
                 <a:latin typeface="Arial"/>
-                <a:hlinkClick r:id="rId3"/>
+                <a:hlinkClick r:id="rId4"/>
               </a:rPr>
               <a:t>ピノキオピー - 歌姫失格 feat. 初音ミク / Rejected Diva</a:t>
             </a:r>
@@ -7908,14 +8565,14 @@
       </p:sp>
       <p:sp>
         <p:nvSpPr>
-          <p:cNvPr id="6" name="TextBox 5"/>
-          <p:cNvSpPr txBox="1"/>
-          <p:nvPr/>
-        </p:nvSpPr>
-        <p:spPr>
-          <a:xfrm>
-            <a:off x="4937760" y="2331720"/>
-            <a:ext cx="3931920" cy="292608"/>
+          <p:cNvPr id="8" name="TextBox 7"/>
+          <p:cNvSpPr txBox="1"/>
+          <p:nvPr/>
+        </p:nvSpPr>
+        <p:spPr>
+          <a:xfrm>
+            <a:off x="4160520" y="2331720"/>
+            <a:ext cx="4663440" cy="292608"/>
           </a:xfrm>
           <a:prstGeom prst="rect">
             <a:avLst/>
@@ -7943,14 +8600,14 @@
       </p:sp>
       <p:sp>
         <p:nvSpPr>
-          <p:cNvPr id="7" name="TextBox 6"/>
-          <p:cNvSpPr txBox="1"/>
-          <p:nvPr/>
-        </p:nvSpPr>
-        <p:spPr>
-          <a:xfrm>
-            <a:off x="4937760" y="2670048"/>
-            <a:ext cx="3931920" cy="320040"/>
+          <p:cNvPr id="9" name="TextBox 8"/>
+          <p:cNvSpPr txBox="1"/>
+          <p:nvPr/>
+        </p:nvSpPr>
+        <p:spPr>
+          <a:xfrm>
+            <a:off x="4160520" y="2670048"/>
+            <a:ext cx="4663440" cy="320040"/>
           </a:xfrm>
           <a:prstGeom prst="rect">
             <a:avLst/>
@@ -7978,14 +8635,14 @@
       </p:sp>
       <p:sp>
         <p:nvSpPr>
-          <p:cNvPr id="8" name="TextBox 7"/>
-          <p:cNvSpPr txBox="1"/>
-          <p:nvPr/>
-        </p:nvSpPr>
-        <p:spPr>
-          <a:xfrm>
-            <a:off x="4937760" y="3017520"/>
-            <a:ext cx="3931920" cy="292608"/>
+          <p:cNvPr id="10" name="TextBox 9"/>
+          <p:cNvSpPr txBox="1"/>
+          <p:nvPr/>
+        </p:nvSpPr>
+        <p:spPr>
+          <a:xfrm>
+            <a:off x="4160520" y="3035808"/>
+            <a:ext cx="4663440" cy="292608"/>
           </a:xfrm>
           <a:prstGeom prst="rect">
             <a:avLst/>
@@ -8006,20 +8663,20 @@
                 </a:solidFill>
                 <a:latin typeface="Arial"/>
               </a:rPr>
-              <a:t>⏱ 3:22  ·  公開38時間前</a:t>
-            </a:r>
-          </a:p>
-        </p:txBody>
-      </p:sp>
-      <p:sp>
-        <p:nvSpPr>
-          <p:cNvPr id="9" name="TextBox 8"/>
-          <p:cNvSpPr txBox="1"/>
-          <p:nvPr/>
-        </p:nvSpPr>
-        <p:spPr>
-          <a:xfrm>
-            <a:off x="320040" y="3547872"/>
+              <a:t>⏱ 3:22  ·  📅 公開41時間前</a:t>
+            </a:r>
+          </a:p>
+        </p:txBody>
+      </p:sp>
+      <p:sp>
+        <p:nvSpPr>
+          <p:cNvPr id="11" name="TextBox 10"/>
+          <p:cNvSpPr txBox="1"/>
+          <p:nvPr/>
+        </p:nvSpPr>
+        <p:spPr>
+          <a:xfrm>
+            <a:off x="320040" y="4160520"/>
             <a:ext cx="8503920" cy="548640"/>
           </a:xfrm>
           <a:prstGeom prst="rect">
@@ -8159,23 +8816,82 @@
         <p:spPr>
           <a:xfrm>
             <a:off x="320040" y="960120"/>
-            <a:ext cx="4389120" cy="2468880"/>
+            <a:ext cx="3657600" cy="2057400"/>
           </a:xfrm>
           <a:prstGeom prst="rect">
             <a:avLst/>
           </a:prstGeom>
         </p:spPr>
       </p:pic>
-      <p:sp>
-        <p:nvSpPr>
-          <p:cNvPr id="5" name="TextBox 4"/>
-          <p:cNvSpPr txBox="1"/>
-          <p:nvPr/>
-        </p:nvSpPr>
-        <p:spPr>
-          <a:xfrm>
-            <a:off x="4937760" y="777240"/>
-            <a:ext cx="3931920" cy="1463040"/>
+      <p:pic>
+        <p:nvPicPr>
+          <p:cNvPr id="5" name="Picture 4" descr="image.png"/>
+          <p:cNvPicPr>
+            <a:picLocks noChangeAspect="1"/>
+          </p:cNvPicPr>
+          <p:nvPr/>
+        </p:nvPicPr>
+        <p:blipFill>
+          <a:blip r:embed="rId3"/>
+          <a:stretch>
+            <a:fillRect/>
+          </a:stretch>
+        </p:blipFill>
+        <p:spPr>
+          <a:xfrm>
+            <a:off x="320040" y="3090672"/>
+            <a:ext cx="1005840" cy="1005840"/>
+          </a:xfrm>
+          <a:prstGeom prst="rect">
+            <a:avLst/>
+          </a:prstGeom>
+        </p:spPr>
+      </p:pic>
+      <p:sp>
+        <p:nvSpPr>
+          <p:cNvPr id="6" name="TextBox 5"/>
+          <p:cNvSpPr txBox="1"/>
+          <p:nvPr/>
+        </p:nvSpPr>
+        <p:spPr>
+          <a:xfrm>
+            <a:off x="1417320" y="3246120"/>
+            <a:ext cx="2606040" cy="365760"/>
+          </a:xfrm>
+          <a:prstGeom prst="rect">
+            <a:avLst/>
+          </a:prstGeom>
+          <a:noFill/>
+        </p:spPr>
+        <p:txBody>
+          <a:bodyPr wrap="none">
+            <a:spAutoFit/>
+          </a:bodyPr>
+          <a:lstStyle/>
+          <a:p>
+            <a:pPr algn="l"/>
+            <a:r>
+              <a:rPr sz="700" b="0">
+                <a:solidFill>
+                  <a:srgbClr val="AAAAAA"/>
+                </a:solidFill>
+                <a:latin typeface="Arial"/>
+              </a:rPr>
+              <a:t>https://www.youtube.com/watch?v=j7A-L6EocDA</a:t>
+            </a:r>
+          </a:p>
+        </p:txBody>
+      </p:sp>
+      <p:sp>
+        <p:nvSpPr>
+          <p:cNvPr id="7" name="TextBox 6"/>
+          <p:cNvSpPr txBox="1"/>
+          <p:nvPr/>
+        </p:nvSpPr>
+        <p:spPr>
+          <a:xfrm>
+            <a:off x="4160520" y="777240"/>
+            <a:ext cx="4663440" cy="1463040"/>
           </a:xfrm>
           <a:prstGeom prst="rect">
             <a:avLst/>
@@ -8195,7 +8911,7 @@
                   <a:srgbClr val="FFFFFF"/>
                 </a:solidFill>
                 <a:latin typeface="Arial"/>
-                <a:hlinkClick r:id="rId3"/>
+                <a:hlinkClick r:id="rId4"/>
               </a:rPr>
               <a:t>ＧⅠ芦屋 ３日目 全日本王座決定戦「シュガーの宝舟ボートレースLIVE2026」</a:t>
             </a:r>
@@ -8204,14 +8920,14 @@
       </p:sp>
       <p:sp>
         <p:nvSpPr>
-          <p:cNvPr id="6" name="TextBox 5"/>
-          <p:cNvSpPr txBox="1"/>
-          <p:nvPr/>
-        </p:nvSpPr>
-        <p:spPr>
-          <a:xfrm>
-            <a:off x="4937760" y="2331720"/>
-            <a:ext cx="3931920" cy="292608"/>
+          <p:cNvPr id="8" name="TextBox 7"/>
+          <p:cNvSpPr txBox="1"/>
+          <p:nvPr/>
+        </p:nvSpPr>
+        <p:spPr>
+          <a:xfrm>
+            <a:off x="4160520" y="2331720"/>
+            <a:ext cx="4663440" cy="292608"/>
           </a:xfrm>
           <a:prstGeom prst="rect">
             <a:avLst/>
@@ -8239,14 +8955,14 @@
       </p:sp>
       <p:sp>
         <p:nvSpPr>
-          <p:cNvPr id="7" name="TextBox 6"/>
-          <p:cNvSpPr txBox="1"/>
-          <p:nvPr/>
-        </p:nvSpPr>
-        <p:spPr>
-          <a:xfrm>
-            <a:off x="4937760" y="2670048"/>
-            <a:ext cx="3931920" cy="320040"/>
+          <p:cNvPr id="9" name="TextBox 8"/>
+          <p:cNvSpPr txBox="1"/>
+          <p:nvPr/>
+        </p:nvSpPr>
+        <p:spPr>
+          <a:xfrm>
+            <a:off x="4160520" y="2670048"/>
+            <a:ext cx="4663440" cy="320040"/>
           </a:xfrm>
           <a:prstGeom prst="rect">
             <a:avLst/>
@@ -8274,14 +8990,14 @@
       </p:sp>
       <p:sp>
         <p:nvSpPr>
-          <p:cNvPr id="8" name="TextBox 7"/>
-          <p:cNvSpPr txBox="1"/>
-          <p:nvPr/>
-        </p:nvSpPr>
-        <p:spPr>
-          <a:xfrm>
-            <a:off x="4937760" y="3017520"/>
-            <a:ext cx="3931920" cy="292608"/>
+          <p:cNvPr id="10" name="TextBox 9"/>
+          <p:cNvSpPr txBox="1"/>
+          <p:nvPr/>
+        </p:nvSpPr>
+        <p:spPr>
+          <a:xfrm>
+            <a:off x="4160520" y="3035808"/>
+            <a:ext cx="4663440" cy="292608"/>
           </a:xfrm>
           <a:prstGeom prst="rect">
             <a:avLst/>
@@ -8302,20 +9018,20 @@
                 </a:solidFill>
                 <a:latin typeface="Arial"/>
               </a:rPr>
-              <a:t>⏱ 6:44:18  ·  公開-8時間前</a:t>
-            </a:r>
-          </a:p>
-        </p:txBody>
-      </p:sp>
-      <p:sp>
-        <p:nvSpPr>
-          <p:cNvPr id="9" name="TextBox 8"/>
-          <p:cNvSpPr txBox="1"/>
-          <p:nvPr/>
-        </p:nvSpPr>
-        <p:spPr>
-          <a:xfrm>
-            <a:off x="320040" y="3547872"/>
+              <a:t>⏱ 6:44:18  ·  📅 公開-5時間前</a:t>
+            </a:r>
+          </a:p>
+        </p:txBody>
+      </p:sp>
+      <p:sp>
+        <p:nvSpPr>
+          <p:cNvPr id="11" name="TextBox 10"/>
+          <p:cNvSpPr txBox="1"/>
+          <p:nvPr/>
+        </p:nvSpPr>
+        <p:spPr>
+          <a:xfrm>
+            <a:off x="320040" y="4160520"/>
             <a:ext cx="8503920" cy="548640"/>
           </a:xfrm>
           <a:prstGeom prst="rect">
@@ -8337,7 +9053,7 @@
                 </a:solidFill>
                 <a:latin typeface="Arial"/>
               </a:rPr>
-              <a:t>💡 公開-8時間で急上昇入り！　急上昇中の新興コンテンツ</a:t>
+              <a:t>💡 公開-5時間で急上昇入り！　急上昇中の新興コンテンツ</a:t>
             </a:r>
           </a:p>
         </p:txBody>
@@ -8455,23 +9171,82 @@
         <p:spPr>
           <a:xfrm>
             <a:off x="320040" y="960120"/>
-            <a:ext cx="4389120" cy="2468880"/>
+            <a:ext cx="3657600" cy="2057400"/>
           </a:xfrm>
           <a:prstGeom prst="rect">
             <a:avLst/>
           </a:prstGeom>
         </p:spPr>
       </p:pic>
-      <p:sp>
-        <p:nvSpPr>
-          <p:cNvPr id="5" name="TextBox 4"/>
-          <p:cNvSpPr txBox="1"/>
-          <p:nvPr/>
-        </p:nvSpPr>
-        <p:spPr>
-          <a:xfrm>
-            <a:off x="4937760" y="777240"/>
-            <a:ext cx="3931920" cy="1463040"/>
+      <p:pic>
+        <p:nvPicPr>
+          <p:cNvPr id="5" name="Picture 4" descr="image.png"/>
+          <p:cNvPicPr>
+            <a:picLocks noChangeAspect="1"/>
+          </p:cNvPicPr>
+          <p:nvPr/>
+        </p:nvPicPr>
+        <p:blipFill>
+          <a:blip r:embed="rId3"/>
+          <a:stretch>
+            <a:fillRect/>
+          </a:stretch>
+        </p:blipFill>
+        <p:spPr>
+          <a:xfrm>
+            <a:off x="320040" y="3090672"/>
+            <a:ext cx="1005840" cy="1005840"/>
+          </a:xfrm>
+          <a:prstGeom prst="rect">
+            <a:avLst/>
+          </a:prstGeom>
+        </p:spPr>
+      </p:pic>
+      <p:sp>
+        <p:nvSpPr>
+          <p:cNvPr id="6" name="TextBox 5"/>
+          <p:cNvSpPr txBox="1"/>
+          <p:nvPr/>
+        </p:nvSpPr>
+        <p:spPr>
+          <a:xfrm>
+            <a:off x="1417320" y="3246120"/>
+            <a:ext cx="2606040" cy="365760"/>
+          </a:xfrm>
+          <a:prstGeom prst="rect">
+            <a:avLst/>
+          </a:prstGeom>
+          <a:noFill/>
+        </p:spPr>
+        <p:txBody>
+          <a:bodyPr wrap="none">
+            <a:spAutoFit/>
+          </a:bodyPr>
+          <a:lstStyle/>
+          <a:p>
+            <a:pPr algn="l"/>
+            <a:r>
+              <a:rPr sz="700" b="0">
+                <a:solidFill>
+                  <a:srgbClr val="AAAAAA"/>
+                </a:solidFill>
+                <a:latin typeface="Arial"/>
+              </a:rPr>
+              <a:t>https://www.youtube.com/watch?v=AgqTpVY_T_k</a:t>
+            </a:r>
+          </a:p>
+        </p:txBody>
+      </p:sp>
+      <p:sp>
+        <p:nvSpPr>
+          <p:cNvPr id="7" name="TextBox 6"/>
+          <p:cNvSpPr txBox="1"/>
+          <p:nvPr/>
+        </p:nvSpPr>
+        <p:spPr>
+          <a:xfrm>
+            <a:off x="4160520" y="777240"/>
+            <a:ext cx="4663440" cy="1463040"/>
           </a:xfrm>
           <a:prstGeom prst="rect">
             <a:avLst/>
@@ -8491,7 +9266,7 @@
                   <a:srgbClr val="FFFFFF"/>
                 </a:solidFill>
                 <a:latin typeface="Arial"/>
-                <a:hlinkClick r:id="rId3"/>
+                <a:hlinkClick r:id="rId4"/>
               </a:rPr>
               <a:t>西野カナ feat. NiziU『LOVE BEAT』MV Full</a:t>
             </a:r>
@@ -8500,14 +9275,14 @@
       </p:sp>
       <p:sp>
         <p:nvSpPr>
-          <p:cNvPr id="6" name="TextBox 5"/>
-          <p:cNvSpPr txBox="1"/>
-          <p:nvPr/>
-        </p:nvSpPr>
-        <p:spPr>
-          <a:xfrm>
-            <a:off x="4937760" y="2331720"/>
-            <a:ext cx="3931920" cy="292608"/>
+          <p:cNvPr id="8" name="TextBox 7"/>
+          <p:cNvSpPr txBox="1"/>
+          <p:nvPr/>
+        </p:nvSpPr>
+        <p:spPr>
+          <a:xfrm>
+            <a:off x="4160520" y="2331720"/>
+            <a:ext cx="4663440" cy="292608"/>
           </a:xfrm>
           <a:prstGeom prst="rect">
             <a:avLst/>
@@ -8535,14 +9310,14 @@
       </p:sp>
       <p:sp>
         <p:nvSpPr>
-          <p:cNvPr id="7" name="TextBox 6"/>
-          <p:cNvSpPr txBox="1"/>
-          <p:nvPr/>
-        </p:nvSpPr>
-        <p:spPr>
-          <a:xfrm>
-            <a:off x="4937760" y="2670048"/>
-            <a:ext cx="3931920" cy="320040"/>
+          <p:cNvPr id="9" name="TextBox 8"/>
+          <p:cNvSpPr txBox="1"/>
+          <p:nvPr/>
+        </p:nvSpPr>
+        <p:spPr>
+          <a:xfrm>
+            <a:off x="4160520" y="2670048"/>
+            <a:ext cx="4663440" cy="320040"/>
           </a:xfrm>
           <a:prstGeom prst="rect">
             <a:avLst/>
@@ -8570,14 +9345,14 @@
       </p:sp>
       <p:sp>
         <p:nvSpPr>
-          <p:cNvPr id="8" name="TextBox 7"/>
-          <p:cNvSpPr txBox="1"/>
-          <p:nvPr/>
-        </p:nvSpPr>
-        <p:spPr>
-          <a:xfrm>
-            <a:off x="4937760" y="3017520"/>
-            <a:ext cx="3931920" cy="292608"/>
+          <p:cNvPr id="10" name="TextBox 9"/>
+          <p:cNvSpPr txBox="1"/>
+          <p:nvPr/>
+        </p:nvSpPr>
+        <p:spPr>
+          <a:xfrm>
+            <a:off x="4160520" y="3035808"/>
+            <a:ext cx="4663440" cy="292608"/>
           </a:xfrm>
           <a:prstGeom prst="rect">
             <a:avLst/>
@@ -8598,20 +9373,20 @@
                 </a:solidFill>
                 <a:latin typeface="Arial"/>
               </a:rPr>
-              <a:t>⏱ 4:12  ·  公開37時間前</a:t>
-            </a:r>
-          </a:p>
-        </p:txBody>
-      </p:sp>
-      <p:sp>
-        <p:nvSpPr>
-          <p:cNvPr id="9" name="TextBox 8"/>
-          <p:cNvSpPr txBox="1"/>
-          <p:nvPr/>
-        </p:nvSpPr>
-        <p:spPr>
-          <a:xfrm>
-            <a:off x="320040" y="3547872"/>
+              <a:t>⏱ 4:12  ·  📅 公開40時間前</a:t>
+            </a:r>
+          </a:p>
+        </p:txBody>
+      </p:sp>
+      <p:sp>
+        <p:nvSpPr>
+          <p:cNvPr id="11" name="TextBox 10"/>
+          <p:cNvSpPr txBox="1"/>
+          <p:nvPr/>
+        </p:nvSpPr>
+        <p:spPr>
+          <a:xfrm>
+            <a:off x="320040" y="4160520"/>
             <a:ext cx="8503920" cy="548640"/>
           </a:xfrm>
           <a:prstGeom prst="rect">
@@ -8751,23 +9526,82 @@
         <p:spPr>
           <a:xfrm>
             <a:off x="320040" y="960120"/>
-            <a:ext cx="4389120" cy="2468880"/>
+            <a:ext cx="3657600" cy="2057400"/>
           </a:xfrm>
           <a:prstGeom prst="rect">
             <a:avLst/>
           </a:prstGeom>
         </p:spPr>
       </p:pic>
-      <p:sp>
-        <p:nvSpPr>
-          <p:cNvPr id="5" name="TextBox 4"/>
-          <p:cNvSpPr txBox="1"/>
-          <p:nvPr/>
-        </p:nvSpPr>
-        <p:spPr>
-          <a:xfrm>
-            <a:off x="4937760" y="777240"/>
-            <a:ext cx="3931920" cy="1463040"/>
+      <p:pic>
+        <p:nvPicPr>
+          <p:cNvPr id="5" name="Picture 4" descr="image.png"/>
+          <p:cNvPicPr>
+            <a:picLocks noChangeAspect="1"/>
+          </p:cNvPicPr>
+          <p:nvPr/>
+        </p:nvPicPr>
+        <p:blipFill>
+          <a:blip r:embed="rId3"/>
+          <a:stretch>
+            <a:fillRect/>
+          </a:stretch>
+        </p:blipFill>
+        <p:spPr>
+          <a:xfrm>
+            <a:off x="320040" y="3090672"/>
+            <a:ext cx="1005840" cy="1005840"/>
+          </a:xfrm>
+          <a:prstGeom prst="rect">
+            <a:avLst/>
+          </a:prstGeom>
+        </p:spPr>
+      </p:pic>
+      <p:sp>
+        <p:nvSpPr>
+          <p:cNvPr id="6" name="TextBox 5"/>
+          <p:cNvSpPr txBox="1"/>
+          <p:nvPr/>
+        </p:nvSpPr>
+        <p:spPr>
+          <a:xfrm>
+            <a:off x="1417320" y="3246120"/>
+            <a:ext cx="2606040" cy="365760"/>
+          </a:xfrm>
+          <a:prstGeom prst="rect">
+            <a:avLst/>
+          </a:prstGeom>
+          <a:noFill/>
+        </p:spPr>
+        <p:txBody>
+          <a:bodyPr wrap="none">
+            <a:spAutoFit/>
+          </a:bodyPr>
+          <a:lstStyle/>
+          <a:p>
+            <a:pPr algn="l"/>
+            <a:r>
+              <a:rPr sz="700" b="0">
+                <a:solidFill>
+                  <a:srgbClr val="AAAAAA"/>
+                </a:solidFill>
+                <a:latin typeface="Arial"/>
+              </a:rPr>
+              <a:t>https://www.youtube.com/watch?v=rwhuXvriFsI</a:t>
+            </a:r>
+          </a:p>
+        </p:txBody>
+      </p:sp>
+      <p:sp>
+        <p:nvSpPr>
+          <p:cNvPr id="7" name="TextBox 6"/>
+          <p:cNvSpPr txBox="1"/>
+          <p:nvPr/>
+        </p:nvSpPr>
+        <p:spPr>
+          <a:xfrm>
+            <a:off x="4160520" y="777240"/>
+            <a:ext cx="4663440" cy="1463040"/>
           </a:xfrm>
           <a:prstGeom prst="rect">
             <a:avLst/>
@@ -8787,7 +9621,7 @@
                   <a:srgbClr val="FFFFFF"/>
                 </a:solidFill>
                 <a:latin typeface="Arial"/>
-                <a:hlinkClick r:id="rId3"/>
+                <a:hlinkClick r:id="rId4"/>
               </a:rPr>
               <a:t>【神回】スプラ初見のFPS元プロ、9日目にして遂にウデマエS+に到達する【スプラ9日目】</a:t>
             </a:r>
@@ -8796,14 +9630,14 @@
       </p:sp>
       <p:sp>
         <p:nvSpPr>
-          <p:cNvPr id="6" name="TextBox 5"/>
-          <p:cNvSpPr txBox="1"/>
-          <p:nvPr/>
-        </p:nvSpPr>
-        <p:spPr>
-          <a:xfrm>
-            <a:off x="4937760" y="2331720"/>
-            <a:ext cx="3931920" cy="292608"/>
+          <p:cNvPr id="8" name="TextBox 7"/>
+          <p:cNvSpPr txBox="1"/>
+          <p:nvPr/>
+        </p:nvSpPr>
+        <p:spPr>
+          <a:xfrm>
+            <a:off x="4160520" y="2331720"/>
+            <a:ext cx="4663440" cy="292608"/>
           </a:xfrm>
           <a:prstGeom prst="rect">
             <a:avLst/>
@@ -8831,14 +9665,14 @@
       </p:sp>
       <p:sp>
         <p:nvSpPr>
-          <p:cNvPr id="7" name="TextBox 6"/>
-          <p:cNvSpPr txBox="1"/>
-          <p:nvPr/>
-        </p:nvSpPr>
-        <p:spPr>
-          <a:xfrm>
-            <a:off x="4937760" y="2670048"/>
-            <a:ext cx="3931920" cy="320040"/>
+          <p:cNvPr id="9" name="TextBox 8"/>
+          <p:cNvSpPr txBox="1"/>
+          <p:nvPr/>
+        </p:nvSpPr>
+        <p:spPr>
+          <a:xfrm>
+            <a:off x="4160520" y="2670048"/>
+            <a:ext cx="4663440" cy="320040"/>
           </a:xfrm>
           <a:prstGeom prst="rect">
             <a:avLst/>
@@ -8866,14 +9700,14 @@
       </p:sp>
       <p:sp>
         <p:nvSpPr>
-          <p:cNvPr id="8" name="TextBox 7"/>
-          <p:cNvSpPr txBox="1"/>
-          <p:nvPr/>
-        </p:nvSpPr>
-        <p:spPr>
-          <a:xfrm>
-            <a:off x="4937760" y="3017520"/>
-            <a:ext cx="3931920" cy="292608"/>
+          <p:cNvPr id="10" name="TextBox 9"/>
+          <p:cNvSpPr txBox="1"/>
+          <p:nvPr/>
+        </p:nvSpPr>
+        <p:spPr>
+          <a:xfrm>
+            <a:off x="4160520" y="3035808"/>
+            <a:ext cx="4663440" cy="292608"/>
           </a:xfrm>
           <a:prstGeom prst="rect">
             <a:avLst/>
@@ -8894,20 +9728,20 @@
                 </a:solidFill>
                 <a:latin typeface="Arial"/>
               </a:rPr>
-              <a:t>⏱ 48:57  ·  公開-4時間前</a:t>
-            </a:r>
-          </a:p>
-        </p:txBody>
-      </p:sp>
-      <p:sp>
-        <p:nvSpPr>
-          <p:cNvPr id="9" name="TextBox 8"/>
-          <p:cNvSpPr txBox="1"/>
-          <p:nvPr/>
-        </p:nvSpPr>
-        <p:spPr>
-          <a:xfrm>
-            <a:off x="320040" y="3547872"/>
+              <a:t>⏱ 48:57  ·  📅 公開-1時間前</a:t>
+            </a:r>
+          </a:p>
+        </p:txBody>
+      </p:sp>
+      <p:sp>
+        <p:nvSpPr>
+          <p:cNvPr id="11" name="TextBox 10"/>
+          <p:cNvSpPr txBox="1"/>
+          <p:nvPr/>
+        </p:nvSpPr>
+        <p:spPr>
+          <a:xfrm>
+            <a:off x="320040" y="4160520"/>
             <a:ext cx="8503920" cy="548640"/>
           </a:xfrm>
           <a:prstGeom prst="rect">
@@ -8929,7 +9763,7 @@
                 </a:solidFill>
                 <a:latin typeface="Arial"/>
               </a:rPr>
-              <a:t>💡 公開-4時間で急上昇入り！　急上昇中の新興コンテンツ　いいね率4.1%と好評価</a:t>
+              <a:t>💡 公開-1時間で急上昇入り！　急上昇中の新興コンテンツ　いいね率4.1%と好評価</a:t>
             </a:r>
           </a:p>
         </p:txBody>
@@ -9047,23 +9881,82 @@
         <p:spPr>
           <a:xfrm>
             <a:off x="320040" y="960120"/>
-            <a:ext cx="4389120" cy="2468880"/>
+            <a:ext cx="3657600" cy="2057400"/>
           </a:xfrm>
           <a:prstGeom prst="rect">
             <a:avLst/>
           </a:prstGeom>
         </p:spPr>
       </p:pic>
-      <p:sp>
-        <p:nvSpPr>
-          <p:cNvPr id="5" name="TextBox 4"/>
-          <p:cNvSpPr txBox="1"/>
-          <p:nvPr/>
-        </p:nvSpPr>
-        <p:spPr>
-          <a:xfrm>
-            <a:off x="4937760" y="777240"/>
-            <a:ext cx="3931920" cy="1463040"/>
+      <p:pic>
+        <p:nvPicPr>
+          <p:cNvPr id="5" name="Picture 4" descr="image.png"/>
+          <p:cNvPicPr>
+            <a:picLocks noChangeAspect="1"/>
+          </p:cNvPicPr>
+          <p:nvPr/>
+        </p:nvPicPr>
+        <p:blipFill>
+          <a:blip r:embed="rId3"/>
+          <a:stretch>
+            <a:fillRect/>
+          </a:stretch>
+        </p:blipFill>
+        <p:spPr>
+          <a:xfrm>
+            <a:off x="320040" y="3090672"/>
+            <a:ext cx="1005840" cy="1005840"/>
+          </a:xfrm>
+          <a:prstGeom prst="rect">
+            <a:avLst/>
+          </a:prstGeom>
+        </p:spPr>
+      </p:pic>
+      <p:sp>
+        <p:nvSpPr>
+          <p:cNvPr id="6" name="TextBox 5"/>
+          <p:cNvSpPr txBox="1"/>
+          <p:nvPr/>
+        </p:nvSpPr>
+        <p:spPr>
+          <a:xfrm>
+            <a:off x="1417320" y="3246120"/>
+            <a:ext cx="2606040" cy="365760"/>
+          </a:xfrm>
+          <a:prstGeom prst="rect">
+            <a:avLst/>
+          </a:prstGeom>
+          <a:noFill/>
+        </p:spPr>
+        <p:txBody>
+          <a:bodyPr wrap="none">
+            <a:spAutoFit/>
+          </a:bodyPr>
+          <a:lstStyle/>
+          <a:p>
+            <a:pPr algn="l"/>
+            <a:r>
+              <a:rPr sz="700" b="0">
+                <a:solidFill>
+                  <a:srgbClr val="AAAAAA"/>
+                </a:solidFill>
+                <a:latin typeface="Arial"/>
+              </a:rPr>
+              <a:t>https://www.youtube.com/watch?v=VhEb3bSXoZM</a:t>
+            </a:r>
+          </a:p>
+        </p:txBody>
+      </p:sp>
+      <p:sp>
+        <p:nvSpPr>
+          <p:cNvPr id="7" name="TextBox 6"/>
+          <p:cNvSpPr txBox="1"/>
+          <p:nvPr/>
+        </p:nvSpPr>
+        <p:spPr>
+          <a:xfrm>
+            <a:off x="4160520" y="777240"/>
+            <a:ext cx="4663440" cy="1463040"/>
           </a:xfrm>
           <a:prstGeom prst="rect">
             <a:avLst/>
@@ -9083,7 +9976,7 @@
                   <a:srgbClr val="FFFFFF"/>
                 </a:solidFill>
                 <a:latin typeface="Arial"/>
-                <a:hlinkClick r:id="rId3"/>
+                <a:hlinkClick r:id="rId4"/>
               </a:rPr>
               <a:t>＜期間限定公開＞Mrs. GREEN APPLE – 風と町【LIVE on TBS “テレビ×ミセス”】</a:t>
             </a:r>
@@ -9092,14 +9985,14 @@
       </p:sp>
       <p:sp>
         <p:nvSpPr>
-          <p:cNvPr id="6" name="TextBox 5"/>
-          <p:cNvSpPr txBox="1"/>
-          <p:nvPr/>
-        </p:nvSpPr>
-        <p:spPr>
-          <a:xfrm>
-            <a:off x="4937760" y="2331720"/>
-            <a:ext cx="3931920" cy="292608"/>
+          <p:cNvPr id="8" name="TextBox 7"/>
+          <p:cNvSpPr txBox="1"/>
+          <p:nvPr/>
+        </p:nvSpPr>
+        <p:spPr>
+          <a:xfrm>
+            <a:off x="4160520" y="2331720"/>
+            <a:ext cx="4663440" cy="292608"/>
           </a:xfrm>
           <a:prstGeom prst="rect">
             <a:avLst/>
@@ -9127,14 +10020,14 @@
       </p:sp>
       <p:sp>
         <p:nvSpPr>
-          <p:cNvPr id="7" name="TextBox 6"/>
-          <p:cNvSpPr txBox="1"/>
-          <p:nvPr/>
-        </p:nvSpPr>
-        <p:spPr>
-          <a:xfrm>
-            <a:off x="4937760" y="2670048"/>
-            <a:ext cx="3931920" cy="320040"/>
+          <p:cNvPr id="9" name="TextBox 8"/>
+          <p:cNvSpPr txBox="1"/>
+          <p:nvPr/>
+        </p:nvSpPr>
+        <p:spPr>
+          <a:xfrm>
+            <a:off x="4160520" y="2670048"/>
+            <a:ext cx="4663440" cy="320040"/>
           </a:xfrm>
           <a:prstGeom prst="rect">
             <a:avLst/>
@@ -9162,14 +10055,14 @@
       </p:sp>
       <p:sp>
         <p:nvSpPr>
-          <p:cNvPr id="8" name="TextBox 7"/>
-          <p:cNvSpPr txBox="1"/>
-          <p:nvPr/>
-        </p:nvSpPr>
-        <p:spPr>
-          <a:xfrm>
-            <a:off x="4937760" y="3017520"/>
-            <a:ext cx="3931920" cy="292608"/>
+          <p:cNvPr id="10" name="TextBox 9"/>
+          <p:cNvSpPr txBox="1"/>
+          <p:nvPr/>
+        </p:nvSpPr>
+        <p:spPr>
+          <a:xfrm>
+            <a:off x="4160520" y="3035808"/>
+            <a:ext cx="4663440" cy="292608"/>
           </a:xfrm>
           <a:prstGeom prst="rect">
             <a:avLst/>
@@ -9190,20 +10083,20 @@
                 </a:solidFill>
                 <a:latin typeface="Arial"/>
               </a:rPr>
-              <a:t>⏱ 3:47  ·  公開15時間前</a:t>
-            </a:r>
-          </a:p>
-        </p:txBody>
-      </p:sp>
-      <p:sp>
-        <p:nvSpPr>
-          <p:cNvPr id="9" name="TextBox 8"/>
-          <p:cNvSpPr txBox="1"/>
-          <p:nvPr/>
-        </p:nvSpPr>
-        <p:spPr>
-          <a:xfrm>
-            <a:off x="320040" y="3547872"/>
+              <a:t>⏱ 3:47  ·  📅 公開18時間前</a:t>
+            </a:r>
+          </a:p>
+        </p:txBody>
+      </p:sp>
+      <p:sp>
+        <p:nvSpPr>
+          <p:cNvPr id="11" name="TextBox 10"/>
+          <p:cNvSpPr txBox="1"/>
+          <p:nvPr/>
+        </p:nvSpPr>
+        <p:spPr>
+          <a:xfrm>
+            <a:off x="320040" y="4160520"/>
             <a:ext cx="8503920" cy="548640"/>
           </a:xfrm>
           <a:prstGeom prst="rect">
@@ -9225,7 +10118,7 @@
                 </a:solidFill>
                 <a:latin typeface="Arial"/>
               </a:rPr>
-              <a:t>💡 公開15時間で急上昇入り！　10万再生突破の話題作　いいね率7.7%と視聴者の支持が非常に高い</a:t>
+              <a:t>💡 公開18時間で急上昇入り！　10万再生突破の話題作　いいね率7.7%と視聴者の支持が非常に高い</a:t>
             </a:r>
           </a:p>
         </p:txBody>
@@ -9343,23 +10236,82 @@
         <p:spPr>
           <a:xfrm>
             <a:off x="320040" y="960120"/>
-            <a:ext cx="4389120" cy="2468880"/>
+            <a:ext cx="3657600" cy="2057400"/>
           </a:xfrm>
           <a:prstGeom prst="rect">
             <a:avLst/>
           </a:prstGeom>
         </p:spPr>
       </p:pic>
-      <p:sp>
-        <p:nvSpPr>
-          <p:cNvPr id="5" name="TextBox 4"/>
-          <p:cNvSpPr txBox="1"/>
-          <p:nvPr/>
-        </p:nvSpPr>
-        <p:spPr>
-          <a:xfrm>
-            <a:off x="4937760" y="777240"/>
-            <a:ext cx="3931920" cy="1463040"/>
+      <p:pic>
+        <p:nvPicPr>
+          <p:cNvPr id="5" name="Picture 4" descr="image.png"/>
+          <p:cNvPicPr>
+            <a:picLocks noChangeAspect="1"/>
+          </p:cNvPicPr>
+          <p:nvPr/>
+        </p:nvPicPr>
+        <p:blipFill>
+          <a:blip r:embed="rId3"/>
+          <a:stretch>
+            <a:fillRect/>
+          </a:stretch>
+        </p:blipFill>
+        <p:spPr>
+          <a:xfrm>
+            <a:off x="320040" y="3090672"/>
+            <a:ext cx="1005840" cy="1005840"/>
+          </a:xfrm>
+          <a:prstGeom prst="rect">
+            <a:avLst/>
+          </a:prstGeom>
+        </p:spPr>
+      </p:pic>
+      <p:sp>
+        <p:nvSpPr>
+          <p:cNvPr id="6" name="TextBox 5"/>
+          <p:cNvSpPr txBox="1"/>
+          <p:nvPr/>
+        </p:nvSpPr>
+        <p:spPr>
+          <a:xfrm>
+            <a:off x="1417320" y="3246120"/>
+            <a:ext cx="2606040" cy="365760"/>
+          </a:xfrm>
+          <a:prstGeom prst="rect">
+            <a:avLst/>
+          </a:prstGeom>
+          <a:noFill/>
+        </p:spPr>
+        <p:txBody>
+          <a:bodyPr wrap="none">
+            <a:spAutoFit/>
+          </a:bodyPr>
+          <a:lstStyle/>
+          <a:p>
+            <a:pPr algn="l"/>
+            <a:r>
+              <a:rPr sz="700" b="0">
+                <a:solidFill>
+                  <a:srgbClr val="AAAAAA"/>
+                </a:solidFill>
+                <a:latin typeface="Arial"/>
+              </a:rPr>
+              <a:t>https://www.youtube.com/watch?v=gXF7kxNvUrQ</a:t>
+            </a:r>
+          </a:p>
+        </p:txBody>
+      </p:sp>
+      <p:sp>
+        <p:nvSpPr>
+          <p:cNvPr id="7" name="TextBox 6"/>
+          <p:cNvSpPr txBox="1"/>
+          <p:nvPr/>
+        </p:nvSpPr>
+        <p:spPr>
+          <a:xfrm>
+            <a:off x="4160520" y="777240"/>
+            <a:ext cx="4663440" cy="1463040"/>
           </a:xfrm>
           <a:prstGeom prst="rect">
             <a:avLst/>
@@ -9379,7 +10331,7 @@
                   <a:srgbClr val="FFFFFF"/>
                 </a:solidFill>
                 <a:latin typeface="Arial"/>
-                <a:hlinkClick r:id="rId3"/>
+                <a:hlinkClick r:id="rId4"/>
               </a:rPr>
               <a:t>【マインクラフト】神回！オウムガイの鎧探しでガチの奇跡が起きました…【ヒカクラ2 - Part176】</a:t>
             </a:r>
@@ -9388,14 +10340,14 @@
       </p:sp>
       <p:sp>
         <p:nvSpPr>
-          <p:cNvPr id="6" name="TextBox 5"/>
-          <p:cNvSpPr txBox="1"/>
-          <p:nvPr/>
-        </p:nvSpPr>
-        <p:spPr>
-          <a:xfrm>
-            <a:off x="4937760" y="2331720"/>
-            <a:ext cx="3931920" cy="292608"/>
+          <p:cNvPr id="8" name="TextBox 7"/>
+          <p:cNvSpPr txBox="1"/>
+          <p:nvPr/>
+        </p:nvSpPr>
+        <p:spPr>
+          <a:xfrm>
+            <a:off x="4160520" y="2331720"/>
+            <a:ext cx="4663440" cy="292608"/>
           </a:xfrm>
           <a:prstGeom prst="rect">
             <a:avLst/>
@@ -9423,14 +10375,14 @@
       </p:sp>
       <p:sp>
         <p:nvSpPr>
-          <p:cNvPr id="7" name="TextBox 6"/>
-          <p:cNvSpPr txBox="1"/>
-          <p:nvPr/>
-        </p:nvSpPr>
-        <p:spPr>
-          <a:xfrm>
-            <a:off x="4937760" y="2670048"/>
-            <a:ext cx="3931920" cy="320040"/>
+          <p:cNvPr id="9" name="TextBox 8"/>
+          <p:cNvSpPr txBox="1"/>
+          <p:nvPr/>
+        </p:nvSpPr>
+        <p:spPr>
+          <a:xfrm>
+            <a:off x="4160520" y="2670048"/>
+            <a:ext cx="4663440" cy="320040"/>
           </a:xfrm>
           <a:prstGeom prst="rect">
             <a:avLst/>
@@ -9458,14 +10410,14 @@
       </p:sp>
       <p:sp>
         <p:nvSpPr>
-          <p:cNvPr id="8" name="TextBox 7"/>
-          <p:cNvSpPr txBox="1"/>
-          <p:nvPr/>
-        </p:nvSpPr>
-        <p:spPr>
-          <a:xfrm>
-            <a:off x="4937760" y="3017520"/>
-            <a:ext cx="3931920" cy="292608"/>
+          <p:cNvPr id="10" name="TextBox 9"/>
+          <p:cNvSpPr txBox="1"/>
+          <p:nvPr/>
+        </p:nvSpPr>
+        <p:spPr>
+          <a:xfrm>
+            <a:off x="4160520" y="3035808"/>
+            <a:ext cx="4663440" cy="292608"/>
           </a:xfrm>
           <a:prstGeom prst="rect">
             <a:avLst/>
@@ -9486,20 +10438,20 @@
                 </a:solidFill>
                 <a:latin typeface="Arial"/>
               </a:rPr>
-              <a:t>⏱ 57:45  ·  公開-2時間前</a:t>
-            </a:r>
-          </a:p>
-        </p:txBody>
-      </p:sp>
-      <p:sp>
-        <p:nvSpPr>
-          <p:cNvPr id="9" name="TextBox 8"/>
-          <p:cNvSpPr txBox="1"/>
-          <p:nvPr/>
-        </p:nvSpPr>
-        <p:spPr>
-          <a:xfrm>
-            <a:off x="320040" y="3547872"/>
+              <a:t>⏱ 57:45  ·  📅 公開0時間前</a:t>
+            </a:r>
+          </a:p>
+        </p:txBody>
+      </p:sp>
+      <p:sp>
+        <p:nvSpPr>
+          <p:cNvPr id="11" name="TextBox 10"/>
+          <p:cNvSpPr txBox="1"/>
+          <p:nvPr/>
+        </p:nvSpPr>
+        <p:spPr>
+          <a:xfrm>
+            <a:off x="320040" y="4160520"/>
             <a:ext cx="8503920" cy="548640"/>
           </a:xfrm>
           <a:prstGeom prst="rect">
@@ -9521,7 +10473,7 @@
                 </a:solidFill>
                 <a:latin typeface="Arial"/>
               </a:rPr>
-              <a:t>💡 公開-2時間で急上昇入り！　10万再生突破の話題作　いいね率3.8%と好評価</a:t>
+              <a:t>💡 公開0時間で急上昇入り！　10万再生突破の話題作　いいね率3.8%と好評価</a:t>
             </a:r>
           </a:p>
         </p:txBody>
@@ -9639,23 +10591,82 @@
         <p:spPr>
           <a:xfrm>
             <a:off x="320040" y="960120"/>
-            <a:ext cx="4389120" cy="2468880"/>
+            <a:ext cx="3657600" cy="2057400"/>
           </a:xfrm>
           <a:prstGeom prst="rect">
             <a:avLst/>
           </a:prstGeom>
         </p:spPr>
       </p:pic>
-      <p:sp>
-        <p:nvSpPr>
-          <p:cNvPr id="5" name="TextBox 4"/>
-          <p:cNvSpPr txBox="1"/>
-          <p:nvPr/>
-        </p:nvSpPr>
-        <p:spPr>
-          <a:xfrm>
-            <a:off x="4937760" y="777240"/>
-            <a:ext cx="3931920" cy="1463040"/>
+      <p:pic>
+        <p:nvPicPr>
+          <p:cNvPr id="5" name="Picture 4" descr="image.png"/>
+          <p:cNvPicPr>
+            <a:picLocks noChangeAspect="1"/>
+          </p:cNvPicPr>
+          <p:nvPr/>
+        </p:nvPicPr>
+        <p:blipFill>
+          <a:blip r:embed="rId3"/>
+          <a:stretch>
+            <a:fillRect/>
+          </a:stretch>
+        </p:blipFill>
+        <p:spPr>
+          <a:xfrm>
+            <a:off x="320040" y="3090672"/>
+            <a:ext cx="1005840" cy="1005840"/>
+          </a:xfrm>
+          <a:prstGeom prst="rect">
+            <a:avLst/>
+          </a:prstGeom>
+        </p:spPr>
+      </p:pic>
+      <p:sp>
+        <p:nvSpPr>
+          <p:cNvPr id="6" name="TextBox 5"/>
+          <p:cNvSpPr txBox="1"/>
+          <p:nvPr/>
+        </p:nvSpPr>
+        <p:spPr>
+          <a:xfrm>
+            <a:off x="1417320" y="3246120"/>
+            <a:ext cx="2606040" cy="365760"/>
+          </a:xfrm>
+          <a:prstGeom prst="rect">
+            <a:avLst/>
+          </a:prstGeom>
+          <a:noFill/>
+        </p:spPr>
+        <p:txBody>
+          <a:bodyPr wrap="none">
+            <a:spAutoFit/>
+          </a:bodyPr>
+          <a:lstStyle/>
+          <a:p>
+            <a:pPr algn="l"/>
+            <a:r>
+              <a:rPr sz="700" b="0">
+                <a:solidFill>
+                  <a:srgbClr val="AAAAAA"/>
+                </a:solidFill>
+                <a:latin typeface="Arial"/>
+              </a:rPr>
+              <a:t>https://www.youtube.com/watch?v=M-ATyBXMzg0</a:t>
+            </a:r>
+          </a:p>
+        </p:txBody>
+      </p:sp>
+      <p:sp>
+        <p:nvSpPr>
+          <p:cNvPr id="7" name="TextBox 6"/>
+          <p:cNvSpPr txBox="1"/>
+          <p:nvPr/>
+        </p:nvSpPr>
+        <p:spPr>
+          <a:xfrm>
+            <a:off x="4160520" y="777240"/>
+            <a:ext cx="4663440" cy="1463040"/>
           </a:xfrm>
           <a:prstGeom prst="rect">
             <a:avLst/>
@@ -9675,7 +10686,7 @@
                   <a:srgbClr val="FFFFFF"/>
                 </a:solidFill>
                 <a:latin typeface="Arial"/>
-                <a:hlinkClick r:id="rId3"/>
+                <a:hlinkClick r:id="rId4"/>
               </a:rPr>
               <a:t>Aぇ! group 「でこぼこライフ」Official Music Video</a:t>
             </a:r>
@@ -9684,14 +10695,14 @@
       </p:sp>
       <p:sp>
         <p:nvSpPr>
-          <p:cNvPr id="6" name="TextBox 5"/>
-          <p:cNvSpPr txBox="1"/>
-          <p:nvPr/>
-        </p:nvSpPr>
-        <p:spPr>
-          <a:xfrm>
-            <a:off x="4937760" y="2331720"/>
-            <a:ext cx="3931920" cy="292608"/>
+          <p:cNvPr id="8" name="TextBox 7"/>
+          <p:cNvSpPr txBox="1"/>
+          <p:nvPr/>
+        </p:nvSpPr>
+        <p:spPr>
+          <a:xfrm>
+            <a:off x="4160520" y="2331720"/>
+            <a:ext cx="4663440" cy="292608"/>
           </a:xfrm>
           <a:prstGeom prst="rect">
             <a:avLst/>
@@ -9719,14 +10730,14 @@
       </p:sp>
       <p:sp>
         <p:nvSpPr>
-          <p:cNvPr id="7" name="TextBox 6"/>
-          <p:cNvSpPr txBox="1"/>
-          <p:nvPr/>
-        </p:nvSpPr>
-        <p:spPr>
-          <a:xfrm>
-            <a:off x="4937760" y="2670048"/>
-            <a:ext cx="3931920" cy="320040"/>
+          <p:cNvPr id="9" name="TextBox 8"/>
+          <p:cNvSpPr txBox="1"/>
+          <p:nvPr/>
+        </p:nvSpPr>
+        <p:spPr>
+          <a:xfrm>
+            <a:off x="4160520" y="2670048"/>
+            <a:ext cx="4663440" cy="320040"/>
           </a:xfrm>
           <a:prstGeom prst="rect">
             <a:avLst/>
@@ -9754,14 +10765,14 @@
       </p:sp>
       <p:sp>
         <p:nvSpPr>
-          <p:cNvPr id="8" name="TextBox 7"/>
-          <p:cNvSpPr txBox="1"/>
-          <p:nvPr/>
-        </p:nvSpPr>
-        <p:spPr>
-          <a:xfrm>
-            <a:off x="4937760" y="3017520"/>
-            <a:ext cx="3931920" cy="292608"/>
+          <p:cNvPr id="10" name="TextBox 9"/>
+          <p:cNvSpPr txBox="1"/>
+          <p:nvPr/>
+        </p:nvSpPr>
+        <p:spPr>
+          <a:xfrm>
+            <a:off x="4160520" y="3035808"/>
+            <a:ext cx="4663440" cy="292608"/>
           </a:xfrm>
           <a:prstGeom prst="rect">
             <a:avLst/>
@@ -9782,20 +10793,20 @@
                 </a:solidFill>
                 <a:latin typeface="Arial"/>
               </a:rPr>
-              <a:t>⏱ 3:34  ·  公開36時間前</a:t>
-            </a:r>
-          </a:p>
-        </p:txBody>
-      </p:sp>
-      <p:sp>
-        <p:nvSpPr>
-          <p:cNvPr id="9" name="TextBox 8"/>
-          <p:cNvSpPr txBox="1"/>
-          <p:nvPr/>
-        </p:nvSpPr>
-        <p:spPr>
-          <a:xfrm>
-            <a:off x="320040" y="3547872"/>
+              <a:t>⏱ 3:34  ·  📅 公開39時間前</a:t>
+            </a:r>
+          </a:p>
+        </p:txBody>
+      </p:sp>
+      <p:sp>
+        <p:nvSpPr>
+          <p:cNvPr id="11" name="TextBox 10"/>
+          <p:cNvSpPr txBox="1"/>
+          <p:nvPr/>
+        </p:nvSpPr>
+        <p:spPr>
+          <a:xfrm>
+            <a:off x="320040" y="4160520"/>
             <a:ext cx="8503920" cy="548640"/>
           </a:xfrm>
           <a:prstGeom prst="rect">
@@ -9935,23 +10946,82 @@
         <p:spPr>
           <a:xfrm>
             <a:off x="320040" y="960120"/>
-            <a:ext cx="4389120" cy="2468880"/>
+            <a:ext cx="3657600" cy="2057400"/>
           </a:xfrm>
           <a:prstGeom prst="rect">
             <a:avLst/>
           </a:prstGeom>
         </p:spPr>
       </p:pic>
-      <p:sp>
-        <p:nvSpPr>
-          <p:cNvPr id="5" name="TextBox 4"/>
-          <p:cNvSpPr txBox="1"/>
-          <p:nvPr/>
-        </p:nvSpPr>
-        <p:spPr>
-          <a:xfrm>
-            <a:off x="4937760" y="777240"/>
-            <a:ext cx="3931920" cy="1463040"/>
+      <p:pic>
+        <p:nvPicPr>
+          <p:cNvPr id="5" name="Picture 4" descr="image.png"/>
+          <p:cNvPicPr>
+            <a:picLocks noChangeAspect="1"/>
+          </p:cNvPicPr>
+          <p:nvPr/>
+        </p:nvPicPr>
+        <p:blipFill>
+          <a:blip r:embed="rId3"/>
+          <a:stretch>
+            <a:fillRect/>
+          </a:stretch>
+        </p:blipFill>
+        <p:spPr>
+          <a:xfrm>
+            <a:off x="320040" y="3090672"/>
+            <a:ext cx="1005840" cy="1005840"/>
+          </a:xfrm>
+          <a:prstGeom prst="rect">
+            <a:avLst/>
+          </a:prstGeom>
+        </p:spPr>
+      </p:pic>
+      <p:sp>
+        <p:nvSpPr>
+          <p:cNvPr id="6" name="TextBox 5"/>
+          <p:cNvSpPr txBox="1"/>
+          <p:nvPr/>
+        </p:nvSpPr>
+        <p:spPr>
+          <a:xfrm>
+            <a:off x="1417320" y="3246120"/>
+            <a:ext cx="2606040" cy="365760"/>
+          </a:xfrm>
+          <a:prstGeom prst="rect">
+            <a:avLst/>
+          </a:prstGeom>
+          <a:noFill/>
+        </p:spPr>
+        <p:txBody>
+          <a:bodyPr wrap="none">
+            <a:spAutoFit/>
+          </a:bodyPr>
+          <a:lstStyle/>
+          <a:p>
+            <a:pPr algn="l"/>
+            <a:r>
+              <a:rPr sz="700" b="0">
+                <a:solidFill>
+                  <a:srgbClr val="AAAAAA"/>
+                </a:solidFill>
+                <a:latin typeface="Arial"/>
+              </a:rPr>
+              <a:t>https://www.youtube.com/watch?v=T_JCzCHCeVs</a:t>
+            </a:r>
+          </a:p>
+        </p:txBody>
+      </p:sp>
+      <p:sp>
+        <p:nvSpPr>
+          <p:cNvPr id="7" name="TextBox 6"/>
+          <p:cNvSpPr txBox="1"/>
+          <p:nvPr/>
+        </p:nvSpPr>
+        <p:spPr>
+          <a:xfrm>
+            <a:off x="4160520" y="777240"/>
+            <a:ext cx="4663440" cy="1463040"/>
           </a:xfrm>
           <a:prstGeom prst="rect">
             <a:avLst/>
@@ -9971,7 +11041,7 @@
                   <a:srgbClr val="FFFFFF"/>
                 </a:solidFill>
                 <a:latin typeface="Arial"/>
-                <a:hlinkClick r:id="rId3"/>
+                <a:hlinkClick r:id="rId4"/>
               </a:rPr>
               <a:t>オープンステージ Day2公式放送【#にじフェス2026_Day2】</a:t>
             </a:r>
@@ -9980,14 +11050,14 @@
       </p:sp>
       <p:sp>
         <p:nvSpPr>
-          <p:cNvPr id="6" name="TextBox 5"/>
-          <p:cNvSpPr txBox="1"/>
-          <p:nvPr/>
-        </p:nvSpPr>
-        <p:spPr>
-          <a:xfrm>
-            <a:off x="4937760" y="2331720"/>
-            <a:ext cx="3931920" cy="292608"/>
+          <p:cNvPr id="8" name="TextBox 7"/>
+          <p:cNvSpPr txBox="1"/>
+          <p:nvPr/>
+        </p:nvSpPr>
+        <p:spPr>
+          <a:xfrm>
+            <a:off x="4160520" y="2331720"/>
+            <a:ext cx="4663440" cy="292608"/>
           </a:xfrm>
           <a:prstGeom prst="rect">
             <a:avLst/>
@@ -10015,14 +11085,14 @@
       </p:sp>
       <p:sp>
         <p:nvSpPr>
-          <p:cNvPr id="7" name="TextBox 6"/>
-          <p:cNvSpPr txBox="1"/>
-          <p:nvPr/>
-        </p:nvSpPr>
-        <p:spPr>
-          <a:xfrm>
-            <a:off x="4937760" y="2670048"/>
-            <a:ext cx="3931920" cy="320040"/>
+          <p:cNvPr id="9" name="TextBox 8"/>
+          <p:cNvSpPr txBox="1"/>
+          <p:nvPr/>
+        </p:nvSpPr>
+        <p:spPr>
+          <a:xfrm>
+            <a:off x="4160520" y="2670048"/>
+            <a:ext cx="4663440" cy="320040"/>
           </a:xfrm>
           <a:prstGeom prst="rect">
             <a:avLst/>
@@ -10050,14 +11120,14 @@
       </p:sp>
       <p:sp>
         <p:nvSpPr>
-          <p:cNvPr id="8" name="TextBox 7"/>
-          <p:cNvSpPr txBox="1"/>
-          <p:nvPr/>
-        </p:nvSpPr>
-        <p:spPr>
-          <a:xfrm>
-            <a:off x="4937760" y="3017520"/>
-            <a:ext cx="3931920" cy="292608"/>
+          <p:cNvPr id="10" name="TextBox 9"/>
+          <p:cNvSpPr txBox="1"/>
+          <p:nvPr/>
+        </p:nvSpPr>
+        <p:spPr>
+          <a:xfrm>
+            <a:off x="4160520" y="3035808"/>
+            <a:ext cx="4663440" cy="292608"/>
           </a:xfrm>
           <a:prstGeom prst="rect">
             <a:avLst/>
@@ -10078,20 +11148,20 @@
                 </a:solidFill>
                 <a:latin typeface="Arial"/>
               </a:rPr>
-              <a:t>⏱ 5:00:37  ·  公開-6時間前</a:t>
-            </a:r>
-          </a:p>
-        </p:txBody>
-      </p:sp>
-      <p:sp>
-        <p:nvSpPr>
-          <p:cNvPr id="9" name="TextBox 8"/>
-          <p:cNvSpPr txBox="1"/>
-          <p:nvPr/>
-        </p:nvSpPr>
-        <p:spPr>
-          <a:xfrm>
-            <a:off x="320040" y="3547872"/>
+              <a:t>⏱ 5:00:37  ·  📅 公開-3時間前</a:t>
+            </a:r>
+          </a:p>
+        </p:txBody>
+      </p:sp>
+      <p:sp>
+        <p:nvSpPr>
+          <p:cNvPr id="11" name="TextBox 10"/>
+          <p:cNvSpPr txBox="1"/>
+          <p:nvPr/>
+        </p:nvSpPr>
+        <p:spPr>
+          <a:xfrm>
+            <a:off x="320040" y="4160520"/>
             <a:ext cx="8503920" cy="548640"/>
           </a:xfrm>
           <a:prstGeom prst="rect">
@@ -10113,7 +11183,7 @@
                 </a:solidFill>
                 <a:latin typeface="Arial"/>
               </a:rPr>
-              <a:t>💡 公開-6時間で急上昇入り！　50万再生の注目コンテンツ</a:t>
+              <a:t>💡 公開-3時間で急上昇入り！　50万再生の注目コンテンツ</a:t>
             </a:r>
           </a:p>
         </p:txBody>

--- a/youtube_ranking_20260517.pptx
+++ b/youtube_ranking_20260517.pptx
@@ -3957,7 +3957,7 @@
         </p:nvSpPr>
         <p:spPr>
           <a:xfrm>
-            <a:off x="274320" y="4498848"/>
+            <a:off x="274320" y="4828032"/>
             <a:ext cx="7406640" cy="228600"/>
           </a:xfrm>
           <a:prstGeom prst="rect">
@@ -4281,7 +4281,42 @@
       </p:sp>
       <p:sp>
         <p:nvSpPr>
-          <p:cNvPr id="10" name="Rectangle 9"/>
+          <p:cNvPr id="10" name="TextBox 9"/>
+          <p:cNvSpPr txBox="1"/>
+          <p:nvPr/>
+        </p:nvSpPr>
+        <p:spPr>
+          <a:xfrm>
+            <a:off x="2697480" y="1389888"/>
+            <a:ext cx="5212080" cy="201168"/>
+          </a:xfrm>
+          <a:prstGeom prst="rect">
+            <a:avLst/>
+          </a:prstGeom>
+          <a:noFill/>
+        </p:spPr>
+        <p:txBody>
+          <a:bodyPr wrap="none">
+            <a:spAutoFit/>
+          </a:bodyPr>
+          <a:lstStyle/>
+          <a:p>
+            <a:pPr algn="l"/>
+            <a:r>
+              <a:rPr sz="700" b="0">
+                <a:solidFill>
+                  <a:srgbClr val="666666"/>
+                </a:solidFill>
+                <a:latin typeface="Arial"/>
+              </a:rPr>
+              <a:t>https://www.youtube.com/watch?v=fBQOV3jiST0</a:t>
+            </a:r>
+          </a:p>
+        </p:txBody>
+      </p:sp>
+      <p:sp>
+        <p:nvSpPr>
+          <p:cNvPr id="11" name="Rectangle 10"/>
           <p:cNvSpPr/>
           <p:nvPr/>
         </p:nvSpPr>
@@ -4326,7 +4361,7 @@
       </p:sp>
       <p:pic>
         <p:nvPicPr>
-          <p:cNvPr id="11" name="Picture 10" descr="image.jpg"/>
+          <p:cNvPr id="12" name="Picture 11" descr="image.jpg"/>
           <p:cNvPicPr>
             <a:picLocks noChangeAspect="1"/>
           </p:cNvPicPr>
@@ -4350,7 +4385,7 @@
       </p:pic>
       <p:sp>
         <p:nvSpPr>
-          <p:cNvPr id="12" name="TextBox 11"/>
+          <p:cNvPr id="13" name="TextBox 12"/>
           <p:cNvSpPr txBox="1"/>
           <p:nvPr/>
         </p:nvSpPr>
@@ -4385,7 +4420,7 @@
       </p:sp>
       <p:sp>
         <p:nvSpPr>
-          <p:cNvPr id="13" name="TextBox 12"/>
+          <p:cNvPr id="14" name="TextBox 13"/>
           <p:cNvSpPr txBox="1"/>
           <p:nvPr/>
         </p:nvSpPr>
@@ -4421,7 +4456,7 @@
       </p:sp>
       <p:pic>
         <p:nvPicPr>
-          <p:cNvPr id="14" name="Picture 13" descr="image.png"/>
+          <p:cNvPr id="15" name="Picture 14" descr="image.png"/>
           <p:cNvPicPr>
             <a:picLocks noChangeAspect="1"/>
           </p:cNvPicPr>
@@ -4445,7 +4480,7 @@
       </p:pic>
       <p:sp>
         <p:nvSpPr>
-          <p:cNvPr id="15" name="TextBox 14"/>
+          <p:cNvPr id="16" name="TextBox 15"/>
           <p:cNvSpPr txBox="1"/>
           <p:nvPr/>
         </p:nvSpPr>
@@ -4480,7 +4515,42 @@
       </p:sp>
       <p:sp>
         <p:nvSpPr>
-          <p:cNvPr id="16" name="Rectangle 15"/>
+          <p:cNvPr id="17" name="TextBox 16"/>
+          <p:cNvSpPr txBox="1"/>
+          <p:nvPr/>
+        </p:nvSpPr>
+        <p:spPr>
+          <a:xfrm>
+            <a:off x="2697480" y="2267712"/>
+            <a:ext cx="5212080" cy="201168"/>
+          </a:xfrm>
+          <a:prstGeom prst="rect">
+            <a:avLst/>
+          </a:prstGeom>
+          <a:noFill/>
+        </p:spPr>
+        <p:txBody>
+          <a:bodyPr wrap="none">
+            <a:spAutoFit/>
+          </a:bodyPr>
+          <a:lstStyle/>
+          <a:p>
+            <a:pPr algn="l"/>
+            <a:r>
+              <a:rPr sz="700" b="0">
+                <a:solidFill>
+                  <a:srgbClr val="666666"/>
+                </a:solidFill>
+                <a:latin typeface="Arial"/>
+              </a:rPr>
+              <a:t>https://www.youtube.com/watch?v=9nXbYZL8V9E</a:t>
+            </a:r>
+          </a:p>
+        </p:txBody>
+      </p:sp>
+      <p:sp>
+        <p:nvSpPr>
+          <p:cNvPr id="18" name="Rectangle 17"/>
           <p:cNvSpPr/>
           <p:nvPr/>
         </p:nvSpPr>
@@ -4525,7 +4595,7 @@
       </p:sp>
       <p:pic>
         <p:nvPicPr>
-          <p:cNvPr id="17" name="Picture 16" descr="image.jpg"/>
+          <p:cNvPr id="19" name="Picture 18" descr="image.jpg"/>
           <p:cNvPicPr>
             <a:picLocks noChangeAspect="1"/>
           </p:cNvPicPr>
@@ -4549,7 +4619,7 @@
       </p:pic>
       <p:sp>
         <p:nvSpPr>
-          <p:cNvPr id="18" name="TextBox 17"/>
+          <p:cNvPr id="20" name="TextBox 19"/>
           <p:cNvSpPr txBox="1"/>
           <p:nvPr/>
         </p:nvSpPr>
@@ -4584,7 +4654,7 @@
       </p:sp>
       <p:sp>
         <p:nvSpPr>
-          <p:cNvPr id="19" name="TextBox 18"/>
+          <p:cNvPr id="21" name="TextBox 20"/>
           <p:cNvSpPr txBox="1"/>
           <p:nvPr/>
         </p:nvSpPr>
@@ -4620,7 +4690,7 @@
       </p:sp>
       <p:pic>
         <p:nvPicPr>
-          <p:cNvPr id="20" name="Picture 19" descr="image.png"/>
+          <p:cNvPr id="22" name="Picture 21" descr="image.png"/>
           <p:cNvPicPr>
             <a:picLocks noChangeAspect="1"/>
           </p:cNvPicPr>
@@ -4644,7 +4714,7 @@
       </p:pic>
       <p:sp>
         <p:nvSpPr>
-          <p:cNvPr id="21" name="TextBox 20"/>
+          <p:cNvPr id="23" name="TextBox 22"/>
           <p:cNvSpPr txBox="1"/>
           <p:nvPr/>
         </p:nvSpPr>
@@ -4679,7 +4749,42 @@
       </p:sp>
       <p:sp>
         <p:nvSpPr>
-          <p:cNvPr id="22" name="Rectangle 21"/>
+          <p:cNvPr id="24" name="TextBox 23"/>
+          <p:cNvSpPr txBox="1"/>
+          <p:nvPr/>
+        </p:nvSpPr>
+        <p:spPr>
+          <a:xfrm>
+            <a:off x="2697480" y="3145536"/>
+            <a:ext cx="5212080" cy="201168"/>
+          </a:xfrm>
+          <a:prstGeom prst="rect">
+            <a:avLst/>
+          </a:prstGeom>
+          <a:noFill/>
+        </p:spPr>
+        <p:txBody>
+          <a:bodyPr wrap="none">
+            <a:spAutoFit/>
+          </a:bodyPr>
+          <a:lstStyle/>
+          <a:p>
+            <a:pPr algn="l"/>
+            <a:r>
+              <a:rPr sz="700" b="0">
+                <a:solidFill>
+                  <a:srgbClr val="666666"/>
+                </a:solidFill>
+                <a:latin typeface="Arial"/>
+              </a:rPr>
+              <a:t>https://www.youtube.com/watch?v=21eblauBPy8</a:t>
+            </a:r>
+          </a:p>
+        </p:txBody>
+      </p:sp>
+      <p:sp>
+        <p:nvSpPr>
+          <p:cNvPr id="25" name="Rectangle 24"/>
           <p:cNvSpPr/>
           <p:nvPr/>
         </p:nvSpPr>
@@ -4724,7 +4829,7 @@
       </p:sp>
       <p:pic>
         <p:nvPicPr>
-          <p:cNvPr id="23" name="Picture 22" descr="image.jpg"/>
+          <p:cNvPr id="26" name="Picture 25" descr="image.jpg"/>
           <p:cNvPicPr>
             <a:picLocks noChangeAspect="1"/>
           </p:cNvPicPr>
@@ -4748,7 +4853,7 @@
       </p:pic>
       <p:sp>
         <p:nvSpPr>
-          <p:cNvPr id="24" name="TextBox 23"/>
+          <p:cNvPr id="27" name="TextBox 26"/>
           <p:cNvSpPr txBox="1"/>
           <p:nvPr/>
         </p:nvSpPr>
@@ -4783,7 +4888,7 @@
       </p:sp>
       <p:sp>
         <p:nvSpPr>
-          <p:cNvPr id="25" name="TextBox 24"/>
+          <p:cNvPr id="28" name="TextBox 27"/>
           <p:cNvSpPr txBox="1"/>
           <p:nvPr/>
         </p:nvSpPr>
@@ -4819,7 +4924,7 @@
       </p:sp>
       <p:pic>
         <p:nvPicPr>
-          <p:cNvPr id="26" name="Picture 25" descr="image.png"/>
+          <p:cNvPr id="29" name="Picture 28" descr="image.png"/>
           <p:cNvPicPr>
             <a:picLocks noChangeAspect="1"/>
           </p:cNvPicPr>
@@ -4843,7 +4948,7 @@
       </p:pic>
       <p:sp>
         <p:nvSpPr>
-          <p:cNvPr id="27" name="TextBox 26"/>
+          <p:cNvPr id="30" name="TextBox 29"/>
           <p:cNvSpPr txBox="1"/>
           <p:nvPr/>
         </p:nvSpPr>
@@ -4878,7 +4983,42 @@
       </p:sp>
       <p:sp>
         <p:nvSpPr>
-          <p:cNvPr id="28" name="Rectangle 27"/>
+          <p:cNvPr id="31" name="TextBox 30"/>
+          <p:cNvSpPr txBox="1"/>
+          <p:nvPr/>
+        </p:nvSpPr>
+        <p:spPr>
+          <a:xfrm>
+            <a:off x="2697480" y="4023360"/>
+            <a:ext cx="5212080" cy="201168"/>
+          </a:xfrm>
+          <a:prstGeom prst="rect">
+            <a:avLst/>
+          </a:prstGeom>
+          <a:noFill/>
+        </p:spPr>
+        <p:txBody>
+          <a:bodyPr wrap="none">
+            <a:spAutoFit/>
+          </a:bodyPr>
+          <a:lstStyle/>
+          <a:p>
+            <a:pPr algn="l"/>
+            <a:r>
+              <a:rPr sz="700" b="0">
+                <a:solidFill>
+                  <a:srgbClr val="666666"/>
+                </a:solidFill>
+                <a:latin typeface="Arial"/>
+              </a:rPr>
+              <a:t>https://www.youtube.com/watch?v=fGaa5iluMIQ</a:t>
+            </a:r>
+          </a:p>
+        </p:txBody>
+      </p:sp>
+      <p:sp>
+        <p:nvSpPr>
+          <p:cNvPr id="32" name="Rectangle 31"/>
           <p:cNvSpPr/>
           <p:nvPr/>
         </p:nvSpPr>
@@ -4923,7 +5063,7 @@
       </p:sp>
       <p:pic>
         <p:nvPicPr>
-          <p:cNvPr id="29" name="Picture 28" descr="image.jpg"/>
+          <p:cNvPr id="33" name="Picture 32" descr="image.jpg"/>
           <p:cNvPicPr>
             <a:picLocks noChangeAspect="1"/>
           </p:cNvPicPr>
@@ -4947,7 +5087,7 @@
       </p:pic>
       <p:sp>
         <p:nvSpPr>
-          <p:cNvPr id="30" name="TextBox 29"/>
+          <p:cNvPr id="34" name="TextBox 33"/>
           <p:cNvSpPr txBox="1"/>
           <p:nvPr/>
         </p:nvSpPr>
@@ -4982,7 +5122,7 @@
       </p:sp>
       <p:sp>
         <p:nvSpPr>
-          <p:cNvPr id="31" name="TextBox 30"/>
+          <p:cNvPr id="35" name="TextBox 34"/>
           <p:cNvSpPr txBox="1"/>
           <p:nvPr/>
         </p:nvSpPr>
@@ -5018,7 +5158,7 @@
       </p:sp>
       <p:pic>
         <p:nvPicPr>
-          <p:cNvPr id="32" name="Picture 31" descr="image.png"/>
+          <p:cNvPr id="36" name="Picture 35" descr="image.png"/>
           <p:cNvPicPr>
             <a:picLocks noChangeAspect="1"/>
           </p:cNvPicPr>
@@ -5042,7 +5182,7 @@
       </p:pic>
       <p:sp>
         <p:nvSpPr>
-          <p:cNvPr id="33" name="TextBox 32"/>
+          <p:cNvPr id="37" name="TextBox 36"/>
           <p:cNvSpPr txBox="1"/>
           <p:nvPr/>
         </p:nvSpPr>
@@ -5071,6 +5211,41 @@
                 <a:latin typeface="Arial"/>
               </a:rPr>
               <a:t>📺 はるえもん  👁 10,520,998  👍 97,733  ⏱ 0:57  📅 2025-10-17</a:t>
+            </a:r>
+          </a:p>
+        </p:txBody>
+      </p:sp>
+      <p:sp>
+        <p:nvSpPr>
+          <p:cNvPr id="38" name="TextBox 37"/>
+          <p:cNvSpPr txBox="1"/>
+          <p:nvPr/>
+        </p:nvSpPr>
+        <p:spPr>
+          <a:xfrm>
+            <a:off x="2697480" y="4901184"/>
+            <a:ext cx="5212080" cy="201168"/>
+          </a:xfrm>
+          <a:prstGeom prst="rect">
+            <a:avLst/>
+          </a:prstGeom>
+          <a:noFill/>
+        </p:spPr>
+        <p:txBody>
+          <a:bodyPr wrap="none">
+            <a:spAutoFit/>
+          </a:bodyPr>
+          <a:lstStyle/>
+          <a:p>
+            <a:pPr algn="l"/>
+            <a:r>
+              <a:rPr sz="700" b="0">
+                <a:solidFill>
+                  <a:srgbClr val="666666"/>
+                </a:solidFill>
+                <a:latin typeface="Arial"/>
+              </a:rPr>
+              <a:t>https://www.youtube.com/watch?v=Mr8II4SLhaI</a:t>
             </a:r>
           </a:p>
         </p:txBody>
@@ -5372,7 +5547,42 @@
       </p:sp>
       <p:sp>
         <p:nvSpPr>
-          <p:cNvPr id="10" name="Rectangle 9"/>
+          <p:cNvPr id="10" name="TextBox 9"/>
+          <p:cNvSpPr txBox="1"/>
+          <p:nvPr/>
+        </p:nvSpPr>
+        <p:spPr>
+          <a:xfrm>
+            <a:off x="2697480" y="1389888"/>
+            <a:ext cx="5212080" cy="201168"/>
+          </a:xfrm>
+          <a:prstGeom prst="rect">
+            <a:avLst/>
+          </a:prstGeom>
+          <a:noFill/>
+        </p:spPr>
+        <p:txBody>
+          <a:bodyPr wrap="none">
+            <a:spAutoFit/>
+          </a:bodyPr>
+          <a:lstStyle/>
+          <a:p>
+            <a:pPr algn="l"/>
+            <a:r>
+              <a:rPr sz="700" b="0">
+                <a:solidFill>
+                  <a:srgbClr val="666666"/>
+                </a:solidFill>
+                <a:latin typeface="Arial"/>
+              </a:rPr>
+              <a:t>https://www.youtube.com/watch?v=DuEKgK2B2p8</a:t>
+            </a:r>
+          </a:p>
+        </p:txBody>
+      </p:sp>
+      <p:sp>
+        <p:nvSpPr>
+          <p:cNvPr id="11" name="Rectangle 10"/>
           <p:cNvSpPr/>
           <p:nvPr/>
         </p:nvSpPr>
@@ -5417,7 +5627,7 @@
       </p:sp>
       <p:pic>
         <p:nvPicPr>
-          <p:cNvPr id="11" name="Picture 10" descr="image.jpg"/>
+          <p:cNvPr id="12" name="Picture 11" descr="image.jpg"/>
           <p:cNvPicPr>
             <a:picLocks noChangeAspect="1"/>
           </p:cNvPicPr>
@@ -5441,7 +5651,7 @@
       </p:pic>
       <p:sp>
         <p:nvSpPr>
-          <p:cNvPr id="12" name="TextBox 11"/>
+          <p:cNvPr id="13" name="TextBox 12"/>
           <p:cNvSpPr txBox="1"/>
           <p:nvPr/>
         </p:nvSpPr>
@@ -5476,7 +5686,7 @@
       </p:sp>
       <p:sp>
         <p:nvSpPr>
-          <p:cNvPr id="13" name="TextBox 12"/>
+          <p:cNvPr id="14" name="TextBox 13"/>
           <p:cNvSpPr txBox="1"/>
           <p:nvPr/>
         </p:nvSpPr>
@@ -5512,7 +5722,7 @@
       </p:sp>
       <p:pic>
         <p:nvPicPr>
-          <p:cNvPr id="14" name="Picture 13" descr="image.png"/>
+          <p:cNvPr id="15" name="Picture 14" descr="image.png"/>
           <p:cNvPicPr>
             <a:picLocks noChangeAspect="1"/>
           </p:cNvPicPr>
@@ -5536,7 +5746,7 @@
       </p:pic>
       <p:sp>
         <p:nvSpPr>
-          <p:cNvPr id="15" name="TextBox 14"/>
+          <p:cNvPr id="16" name="TextBox 15"/>
           <p:cNvSpPr txBox="1"/>
           <p:nvPr/>
         </p:nvSpPr>
@@ -5571,7 +5781,42 @@
       </p:sp>
       <p:sp>
         <p:nvSpPr>
-          <p:cNvPr id="16" name="Rectangle 15"/>
+          <p:cNvPr id="17" name="TextBox 16"/>
+          <p:cNvSpPr txBox="1"/>
+          <p:nvPr/>
+        </p:nvSpPr>
+        <p:spPr>
+          <a:xfrm>
+            <a:off x="2697480" y="2267712"/>
+            <a:ext cx="5212080" cy="201168"/>
+          </a:xfrm>
+          <a:prstGeom prst="rect">
+            <a:avLst/>
+          </a:prstGeom>
+          <a:noFill/>
+        </p:spPr>
+        <p:txBody>
+          <a:bodyPr wrap="none">
+            <a:spAutoFit/>
+          </a:bodyPr>
+          <a:lstStyle/>
+          <a:p>
+            <a:pPr algn="l"/>
+            <a:r>
+              <a:rPr sz="700" b="0">
+                <a:solidFill>
+                  <a:srgbClr val="666666"/>
+                </a:solidFill>
+                <a:latin typeface="Arial"/>
+              </a:rPr>
+              <a:t>https://www.youtube.com/watch?v=mhCy0IgobIw</a:t>
+            </a:r>
+          </a:p>
+        </p:txBody>
+      </p:sp>
+      <p:sp>
+        <p:nvSpPr>
+          <p:cNvPr id="18" name="Rectangle 17"/>
           <p:cNvSpPr/>
           <p:nvPr/>
         </p:nvSpPr>
@@ -5616,7 +5861,7 @@
       </p:sp>
       <p:pic>
         <p:nvPicPr>
-          <p:cNvPr id="17" name="Picture 16" descr="image.jpg"/>
+          <p:cNvPr id="19" name="Picture 18" descr="image.jpg"/>
           <p:cNvPicPr>
             <a:picLocks noChangeAspect="1"/>
           </p:cNvPicPr>
@@ -5640,7 +5885,7 @@
       </p:pic>
       <p:sp>
         <p:nvSpPr>
-          <p:cNvPr id="18" name="TextBox 17"/>
+          <p:cNvPr id="20" name="TextBox 19"/>
           <p:cNvSpPr txBox="1"/>
           <p:nvPr/>
         </p:nvSpPr>
@@ -5675,7 +5920,7 @@
       </p:sp>
       <p:sp>
         <p:nvSpPr>
-          <p:cNvPr id="19" name="TextBox 18"/>
+          <p:cNvPr id="21" name="TextBox 20"/>
           <p:cNvSpPr txBox="1"/>
           <p:nvPr/>
         </p:nvSpPr>
@@ -5711,7 +5956,7 @@
       </p:sp>
       <p:pic>
         <p:nvPicPr>
-          <p:cNvPr id="20" name="Picture 19" descr="image.png"/>
+          <p:cNvPr id="22" name="Picture 21" descr="image.png"/>
           <p:cNvPicPr>
             <a:picLocks noChangeAspect="1"/>
           </p:cNvPicPr>
@@ -5735,7 +5980,7 @@
       </p:pic>
       <p:sp>
         <p:nvSpPr>
-          <p:cNvPr id="21" name="TextBox 20"/>
+          <p:cNvPr id="23" name="TextBox 22"/>
           <p:cNvSpPr txBox="1"/>
           <p:nvPr/>
         </p:nvSpPr>
@@ -5770,7 +6015,42 @@
       </p:sp>
       <p:sp>
         <p:nvSpPr>
-          <p:cNvPr id="22" name="Rectangle 21"/>
+          <p:cNvPr id="24" name="TextBox 23"/>
+          <p:cNvSpPr txBox="1"/>
+          <p:nvPr/>
+        </p:nvSpPr>
+        <p:spPr>
+          <a:xfrm>
+            <a:off x="2697480" y="3145536"/>
+            <a:ext cx="5212080" cy="201168"/>
+          </a:xfrm>
+          <a:prstGeom prst="rect">
+            <a:avLst/>
+          </a:prstGeom>
+          <a:noFill/>
+        </p:spPr>
+        <p:txBody>
+          <a:bodyPr wrap="none">
+            <a:spAutoFit/>
+          </a:bodyPr>
+          <a:lstStyle/>
+          <a:p>
+            <a:pPr algn="l"/>
+            <a:r>
+              <a:rPr sz="700" b="0">
+                <a:solidFill>
+                  <a:srgbClr val="666666"/>
+                </a:solidFill>
+                <a:latin typeface="Arial"/>
+              </a:rPr>
+              <a:t>https://www.youtube.com/watch?v=XGbduoPa_-0</a:t>
+            </a:r>
+          </a:p>
+        </p:txBody>
+      </p:sp>
+      <p:sp>
+        <p:nvSpPr>
+          <p:cNvPr id="25" name="Rectangle 24"/>
           <p:cNvSpPr/>
           <p:nvPr/>
         </p:nvSpPr>
@@ -5815,7 +6095,7 @@
       </p:sp>
       <p:pic>
         <p:nvPicPr>
-          <p:cNvPr id="23" name="Picture 22" descr="image.jpg"/>
+          <p:cNvPr id="26" name="Picture 25" descr="image.jpg"/>
           <p:cNvPicPr>
             <a:picLocks noChangeAspect="1"/>
           </p:cNvPicPr>
@@ -5839,7 +6119,7 @@
       </p:pic>
       <p:sp>
         <p:nvSpPr>
-          <p:cNvPr id="24" name="TextBox 23"/>
+          <p:cNvPr id="27" name="TextBox 26"/>
           <p:cNvSpPr txBox="1"/>
           <p:nvPr/>
         </p:nvSpPr>
@@ -5874,7 +6154,7 @@
       </p:sp>
       <p:sp>
         <p:nvSpPr>
-          <p:cNvPr id="25" name="TextBox 24"/>
+          <p:cNvPr id="28" name="TextBox 27"/>
           <p:cNvSpPr txBox="1"/>
           <p:nvPr/>
         </p:nvSpPr>
@@ -5910,7 +6190,7 @@
       </p:sp>
       <p:pic>
         <p:nvPicPr>
-          <p:cNvPr id="26" name="Picture 25" descr="image.png"/>
+          <p:cNvPr id="29" name="Picture 28" descr="image.png"/>
           <p:cNvPicPr>
             <a:picLocks noChangeAspect="1"/>
           </p:cNvPicPr>
@@ -5934,7 +6214,7 @@
       </p:pic>
       <p:sp>
         <p:nvSpPr>
-          <p:cNvPr id="27" name="TextBox 26"/>
+          <p:cNvPr id="30" name="TextBox 29"/>
           <p:cNvSpPr txBox="1"/>
           <p:nvPr/>
         </p:nvSpPr>
@@ -5969,7 +6249,42 @@
       </p:sp>
       <p:sp>
         <p:nvSpPr>
-          <p:cNvPr id="28" name="Rectangle 27"/>
+          <p:cNvPr id="31" name="TextBox 30"/>
+          <p:cNvSpPr txBox="1"/>
+          <p:nvPr/>
+        </p:nvSpPr>
+        <p:spPr>
+          <a:xfrm>
+            <a:off x="2697480" y="4023360"/>
+            <a:ext cx="5212080" cy="201168"/>
+          </a:xfrm>
+          <a:prstGeom prst="rect">
+            <a:avLst/>
+          </a:prstGeom>
+          <a:noFill/>
+        </p:spPr>
+        <p:txBody>
+          <a:bodyPr wrap="none">
+            <a:spAutoFit/>
+          </a:bodyPr>
+          <a:lstStyle/>
+          <a:p>
+            <a:pPr algn="l"/>
+            <a:r>
+              <a:rPr sz="700" b="0">
+                <a:solidFill>
+                  <a:srgbClr val="666666"/>
+                </a:solidFill>
+                <a:latin typeface="Arial"/>
+              </a:rPr>
+              <a:t>https://www.youtube.com/watch?v=k3pCB0OwN10</a:t>
+            </a:r>
+          </a:p>
+        </p:txBody>
+      </p:sp>
+      <p:sp>
+        <p:nvSpPr>
+          <p:cNvPr id="32" name="Rectangle 31"/>
           <p:cNvSpPr/>
           <p:nvPr/>
         </p:nvSpPr>
@@ -6014,7 +6329,7 @@
       </p:sp>
       <p:pic>
         <p:nvPicPr>
-          <p:cNvPr id="29" name="Picture 28" descr="image.jpg"/>
+          <p:cNvPr id="33" name="Picture 32" descr="image.jpg"/>
           <p:cNvPicPr>
             <a:picLocks noChangeAspect="1"/>
           </p:cNvPicPr>
@@ -6038,7 +6353,7 @@
       </p:pic>
       <p:sp>
         <p:nvSpPr>
-          <p:cNvPr id="30" name="TextBox 29"/>
+          <p:cNvPr id="34" name="TextBox 33"/>
           <p:cNvSpPr txBox="1"/>
           <p:nvPr/>
         </p:nvSpPr>
@@ -6073,7 +6388,7 @@
       </p:sp>
       <p:sp>
         <p:nvSpPr>
-          <p:cNvPr id="31" name="TextBox 30"/>
+          <p:cNvPr id="35" name="TextBox 34"/>
           <p:cNvSpPr txBox="1"/>
           <p:nvPr/>
         </p:nvSpPr>
@@ -6109,7 +6424,7 @@
       </p:sp>
       <p:pic>
         <p:nvPicPr>
-          <p:cNvPr id="32" name="Picture 31" descr="image.png"/>
+          <p:cNvPr id="36" name="Picture 35" descr="image.png"/>
           <p:cNvPicPr>
             <a:picLocks noChangeAspect="1"/>
           </p:cNvPicPr>
@@ -6133,7 +6448,7 @@
       </p:pic>
       <p:sp>
         <p:nvSpPr>
-          <p:cNvPr id="33" name="TextBox 32"/>
+          <p:cNvPr id="37" name="TextBox 36"/>
           <p:cNvSpPr txBox="1"/>
           <p:nvPr/>
         </p:nvSpPr>
@@ -6162,6 +6477,41 @@
                 <a:latin typeface="Arial"/>
               </a:rPr>
               <a:t>📺 葉ちゅべ  👁 18,311,704  👍 348,188  ⏱ 0:38  📅 2023-07-07</a:t>
+            </a:r>
+          </a:p>
+        </p:txBody>
+      </p:sp>
+      <p:sp>
+        <p:nvSpPr>
+          <p:cNvPr id="38" name="TextBox 37"/>
+          <p:cNvSpPr txBox="1"/>
+          <p:nvPr/>
+        </p:nvSpPr>
+        <p:spPr>
+          <a:xfrm>
+            <a:off x="2697480" y="4901184"/>
+            <a:ext cx="5212080" cy="201168"/>
+          </a:xfrm>
+          <a:prstGeom prst="rect">
+            <a:avLst/>
+          </a:prstGeom>
+          <a:noFill/>
+        </p:spPr>
+        <p:txBody>
+          <a:bodyPr wrap="none">
+            <a:spAutoFit/>
+          </a:bodyPr>
+          <a:lstStyle/>
+          <a:p>
+            <a:pPr algn="l"/>
+            <a:r>
+              <a:rPr sz="700" b="0">
+                <a:solidFill>
+                  <a:srgbClr val="666666"/>
+                </a:solidFill>
+                <a:latin typeface="Arial"/>
+              </a:rPr>
+              <a:t>https://www.youtube.com/watch?v=0cjKg-Z3xak</a:t>
             </a:r>
           </a:p>
         </p:txBody>
@@ -6463,7 +6813,42 @@
       </p:sp>
       <p:sp>
         <p:nvSpPr>
-          <p:cNvPr id="10" name="Rectangle 9"/>
+          <p:cNvPr id="10" name="TextBox 9"/>
+          <p:cNvSpPr txBox="1"/>
+          <p:nvPr/>
+        </p:nvSpPr>
+        <p:spPr>
+          <a:xfrm>
+            <a:off x="2697480" y="1389888"/>
+            <a:ext cx="5212080" cy="201168"/>
+          </a:xfrm>
+          <a:prstGeom prst="rect">
+            <a:avLst/>
+          </a:prstGeom>
+          <a:noFill/>
+        </p:spPr>
+        <p:txBody>
+          <a:bodyPr wrap="none">
+            <a:spAutoFit/>
+          </a:bodyPr>
+          <a:lstStyle/>
+          <a:p>
+            <a:pPr algn="l"/>
+            <a:r>
+              <a:rPr sz="700" b="0">
+                <a:solidFill>
+                  <a:srgbClr val="666666"/>
+                </a:solidFill>
+                <a:latin typeface="Arial"/>
+              </a:rPr>
+              <a:t>https://www.youtube.com/watch?v=1JrBFDwE-jo</a:t>
+            </a:r>
+          </a:p>
+        </p:txBody>
+      </p:sp>
+      <p:sp>
+        <p:nvSpPr>
+          <p:cNvPr id="11" name="Rectangle 10"/>
           <p:cNvSpPr/>
           <p:nvPr/>
         </p:nvSpPr>
@@ -6508,7 +6893,7 @@
       </p:sp>
       <p:pic>
         <p:nvPicPr>
-          <p:cNvPr id="11" name="Picture 10" descr="image.jpg"/>
+          <p:cNvPr id="12" name="Picture 11" descr="image.jpg"/>
           <p:cNvPicPr>
             <a:picLocks noChangeAspect="1"/>
           </p:cNvPicPr>
@@ -6532,7 +6917,7 @@
       </p:pic>
       <p:sp>
         <p:nvSpPr>
-          <p:cNvPr id="12" name="TextBox 11"/>
+          <p:cNvPr id="13" name="TextBox 12"/>
           <p:cNvSpPr txBox="1"/>
           <p:nvPr/>
         </p:nvSpPr>
@@ -6567,7 +6952,7 @@
       </p:sp>
       <p:sp>
         <p:nvSpPr>
-          <p:cNvPr id="13" name="TextBox 12"/>
+          <p:cNvPr id="14" name="TextBox 13"/>
           <p:cNvSpPr txBox="1"/>
           <p:nvPr/>
         </p:nvSpPr>
@@ -6603,7 +6988,7 @@
       </p:sp>
       <p:pic>
         <p:nvPicPr>
-          <p:cNvPr id="14" name="Picture 13" descr="image.png"/>
+          <p:cNvPr id="15" name="Picture 14" descr="image.png"/>
           <p:cNvPicPr>
             <a:picLocks noChangeAspect="1"/>
           </p:cNvPicPr>
@@ -6627,7 +7012,7 @@
       </p:pic>
       <p:sp>
         <p:nvSpPr>
-          <p:cNvPr id="15" name="TextBox 14"/>
+          <p:cNvPr id="16" name="TextBox 15"/>
           <p:cNvSpPr txBox="1"/>
           <p:nvPr/>
         </p:nvSpPr>
@@ -6662,7 +7047,42 @@
       </p:sp>
       <p:sp>
         <p:nvSpPr>
-          <p:cNvPr id="16" name="Rectangle 15"/>
+          <p:cNvPr id="17" name="TextBox 16"/>
+          <p:cNvSpPr txBox="1"/>
+          <p:nvPr/>
+        </p:nvSpPr>
+        <p:spPr>
+          <a:xfrm>
+            <a:off x="2697480" y="2267712"/>
+            <a:ext cx="5212080" cy="201168"/>
+          </a:xfrm>
+          <a:prstGeom prst="rect">
+            <a:avLst/>
+          </a:prstGeom>
+          <a:noFill/>
+        </p:spPr>
+        <p:txBody>
+          <a:bodyPr wrap="none">
+            <a:spAutoFit/>
+          </a:bodyPr>
+          <a:lstStyle/>
+          <a:p>
+            <a:pPr algn="l"/>
+            <a:r>
+              <a:rPr sz="700" b="0">
+                <a:solidFill>
+                  <a:srgbClr val="666666"/>
+                </a:solidFill>
+                <a:latin typeface="Arial"/>
+              </a:rPr>
+              <a:t>https://www.youtube.com/watch?v=88uap7ImJ88</a:t>
+            </a:r>
+          </a:p>
+        </p:txBody>
+      </p:sp>
+      <p:sp>
+        <p:nvSpPr>
+          <p:cNvPr id="18" name="Rectangle 17"/>
           <p:cNvSpPr/>
           <p:nvPr/>
         </p:nvSpPr>
@@ -6707,7 +7127,7 @@
       </p:sp>
       <p:pic>
         <p:nvPicPr>
-          <p:cNvPr id="17" name="Picture 16" descr="image.jpg"/>
+          <p:cNvPr id="19" name="Picture 18" descr="image.jpg"/>
           <p:cNvPicPr>
             <a:picLocks noChangeAspect="1"/>
           </p:cNvPicPr>
@@ -6731,7 +7151,7 @@
       </p:pic>
       <p:sp>
         <p:nvSpPr>
-          <p:cNvPr id="18" name="TextBox 17"/>
+          <p:cNvPr id="20" name="TextBox 19"/>
           <p:cNvSpPr txBox="1"/>
           <p:nvPr/>
         </p:nvSpPr>
@@ -6766,7 +7186,7 @@
       </p:sp>
       <p:sp>
         <p:nvSpPr>
-          <p:cNvPr id="19" name="TextBox 18"/>
+          <p:cNvPr id="21" name="TextBox 20"/>
           <p:cNvSpPr txBox="1"/>
           <p:nvPr/>
         </p:nvSpPr>
@@ -6802,7 +7222,7 @@
       </p:sp>
       <p:pic>
         <p:nvPicPr>
-          <p:cNvPr id="20" name="Picture 19" descr="image.png"/>
+          <p:cNvPr id="22" name="Picture 21" descr="image.png"/>
           <p:cNvPicPr>
             <a:picLocks noChangeAspect="1"/>
           </p:cNvPicPr>
@@ -6826,7 +7246,7 @@
       </p:pic>
       <p:sp>
         <p:nvSpPr>
-          <p:cNvPr id="21" name="TextBox 20"/>
+          <p:cNvPr id="23" name="TextBox 22"/>
           <p:cNvSpPr txBox="1"/>
           <p:nvPr/>
         </p:nvSpPr>
@@ -6861,7 +7281,42 @@
       </p:sp>
       <p:sp>
         <p:nvSpPr>
-          <p:cNvPr id="22" name="Rectangle 21"/>
+          <p:cNvPr id="24" name="TextBox 23"/>
+          <p:cNvSpPr txBox="1"/>
+          <p:nvPr/>
+        </p:nvSpPr>
+        <p:spPr>
+          <a:xfrm>
+            <a:off x="2697480" y="3145536"/>
+            <a:ext cx="5212080" cy="201168"/>
+          </a:xfrm>
+          <a:prstGeom prst="rect">
+            <a:avLst/>
+          </a:prstGeom>
+          <a:noFill/>
+        </p:spPr>
+        <p:txBody>
+          <a:bodyPr wrap="none">
+            <a:spAutoFit/>
+          </a:bodyPr>
+          <a:lstStyle/>
+          <a:p>
+            <a:pPr algn="l"/>
+            <a:r>
+              <a:rPr sz="700" b="0">
+                <a:solidFill>
+                  <a:srgbClr val="666666"/>
+                </a:solidFill>
+                <a:latin typeface="Arial"/>
+              </a:rPr>
+              <a:t>https://www.youtube.com/watch?v=gcgKUcJKxIs</a:t>
+            </a:r>
+          </a:p>
+        </p:txBody>
+      </p:sp>
+      <p:sp>
+        <p:nvSpPr>
+          <p:cNvPr id="25" name="Rectangle 24"/>
           <p:cNvSpPr/>
           <p:nvPr/>
         </p:nvSpPr>
@@ -6906,7 +7361,7 @@
       </p:sp>
       <p:pic>
         <p:nvPicPr>
-          <p:cNvPr id="23" name="Picture 22" descr="image.jpg"/>
+          <p:cNvPr id="26" name="Picture 25" descr="image.jpg"/>
           <p:cNvPicPr>
             <a:picLocks noChangeAspect="1"/>
           </p:cNvPicPr>
@@ -6930,7 +7385,7 @@
       </p:pic>
       <p:sp>
         <p:nvSpPr>
-          <p:cNvPr id="24" name="TextBox 23"/>
+          <p:cNvPr id="27" name="TextBox 26"/>
           <p:cNvSpPr txBox="1"/>
           <p:nvPr/>
         </p:nvSpPr>
@@ -6965,7 +7420,7 @@
       </p:sp>
       <p:sp>
         <p:nvSpPr>
-          <p:cNvPr id="25" name="TextBox 24"/>
+          <p:cNvPr id="28" name="TextBox 27"/>
           <p:cNvSpPr txBox="1"/>
           <p:nvPr/>
         </p:nvSpPr>
@@ -7001,7 +7456,7 @@
       </p:sp>
       <p:pic>
         <p:nvPicPr>
-          <p:cNvPr id="26" name="Picture 25" descr="image.png"/>
+          <p:cNvPr id="29" name="Picture 28" descr="image.png"/>
           <p:cNvPicPr>
             <a:picLocks noChangeAspect="1"/>
           </p:cNvPicPr>
@@ -7025,7 +7480,7 @@
       </p:pic>
       <p:sp>
         <p:nvSpPr>
-          <p:cNvPr id="27" name="TextBox 26"/>
+          <p:cNvPr id="30" name="TextBox 29"/>
           <p:cNvSpPr txBox="1"/>
           <p:nvPr/>
         </p:nvSpPr>
@@ -7060,7 +7515,42 @@
       </p:sp>
       <p:sp>
         <p:nvSpPr>
-          <p:cNvPr id="28" name="Rectangle 27"/>
+          <p:cNvPr id="31" name="TextBox 30"/>
+          <p:cNvSpPr txBox="1"/>
+          <p:nvPr/>
+        </p:nvSpPr>
+        <p:spPr>
+          <a:xfrm>
+            <a:off x="2697480" y="4023360"/>
+            <a:ext cx="5212080" cy="201168"/>
+          </a:xfrm>
+          <a:prstGeom prst="rect">
+            <a:avLst/>
+          </a:prstGeom>
+          <a:noFill/>
+        </p:spPr>
+        <p:txBody>
+          <a:bodyPr wrap="none">
+            <a:spAutoFit/>
+          </a:bodyPr>
+          <a:lstStyle/>
+          <a:p>
+            <a:pPr algn="l"/>
+            <a:r>
+              <a:rPr sz="700" b="0">
+                <a:solidFill>
+                  <a:srgbClr val="666666"/>
+                </a:solidFill>
+                <a:latin typeface="Arial"/>
+              </a:rPr>
+              <a:t>https://www.youtube.com/watch?v=-NFhRWhkp7I</a:t>
+            </a:r>
+          </a:p>
+        </p:txBody>
+      </p:sp>
+      <p:sp>
+        <p:nvSpPr>
+          <p:cNvPr id="32" name="Rectangle 31"/>
           <p:cNvSpPr/>
           <p:nvPr/>
         </p:nvSpPr>
@@ -7105,7 +7595,7 @@
       </p:sp>
       <p:pic>
         <p:nvPicPr>
-          <p:cNvPr id="29" name="Picture 28" descr="image.jpg"/>
+          <p:cNvPr id="33" name="Picture 32" descr="image.jpg"/>
           <p:cNvPicPr>
             <a:picLocks noChangeAspect="1"/>
           </p:cNvPicPr>
@@ -7129,7 +7619,7 @@
       </p:pic>
       <p:sp>
         <p:nvSpPr>
-          <p:cNvPr id="30" name="TextBox 29"/>
+          <p:cNvPr id="34" name="TextBox 33"/>
           <p:cNvSpPr txBox="1"/>
           <p:nvPr/>
         </p:nvSpPr>
@@ -7164,7 +7654,7 @@
       </p:sp>
       <p:sp>
         <p:nvSpPr>
-          <p:cNvPr id="31" name="TextBox 30"/>
+          <p:cNvPr id="35" name="TextBox 34"/>
           <p:cNvSpPr txBox="1"/>
           <p:nvPr/>
         </p:nvSpPr>
@@ -7200,7 +7690,7 @@
       </p:sp>
       <p:pic>
         <p:nvPicPr>
-          <p:cNvPr id="32" name="Picture 31" descr="image.png"/>
+          <p:cNvPr id="36" name="Picture 35" descr="image.png"/>
           <p:cNvPicPr>
             <a:picLocks noChangeAspect="1"/>
           </p:cNvPicPr>
@@ -7224,7 +7714,7 @@
       </p:pic>
       <p:sp>
         <p:nvSpPr>
-          <p:cNvPr id="33" name="TextBox 32"/>
+          <p:cNvPr id="37" name="TextBox 36"/>
           <p:cNvSpPr txBox="1"/>
           <p:nvPr/>
         </p:nvSpPr>
@@ -7253,6 +7743,41 @@
                 <a:latin typeface="Arial"/>
               </a:rPr>
               <a:t>📺 アイナ・ジ・エンド Official  👁 42,536,066  👍 184,328  ⏱ 3:22  📅 2025-08-20</a:t>
+            </a:r>
+          </a:p>
+        </p:txBody>
+      </p:sp>
+      <p:sp>
+        <p:nvSpPr>
+          <p:cNvPr id="38" name="TextBox 37"/>
+          <p:cNvSpPr txBox="1"/>
+          <p:nvPr/>
+        </p:nvSpPr>
+        <p:spPr>
+          <a:xfrm>
+            <a:off x="2697480" y="4901184"/>
+            <a:ext cx="5212080" cy="201168"/>
+          </a:xfrm>
+          <a:prstGeom prst="rect">
+            <a:avLst/>
+          </a:prstGeom>
+          <a:noFill/>
+        </p:spPr>
+        <p:txBody>
+          <a:bodyPr wrap="none">
+            <a:spAutoFit/>
+          </a:bodyPr>
+          <a:lstStyle/>
+          <a:p>
+            <a:pPr algn="l"/>
+            <a:r>
+              <a:rPr sz="700" b="0">
+                <a:solidFill>
+                  <a:srgbClr val="666666"/>
+                </a:solidFill>
+                <a:latin typeface="Arial"/>
+              </a:rPr>
+              <a:t>https://www.youtube.com/watch?v=ScWlFcYn_FI</a:t>
             </a:r>
           </a:p>
         </p:txBody>
@@ -7554,7 +8079,42 @@
       </p:sp>
       <p:sp>
         <p:nvSpPr>
-          <p:cNvPr id="10" name="Rectangle 9"/>
+          <p:cNvPr id="10" name="TextBox 9"/>
+          <p:cNvSpPr txBox="1"/>
+          <p:nvPr/>
+        </p:nvSpPr>
+        <p:spPr>
+          <a:xfrm>
+            <a:off x="2697480" y="1389888"/>
+            <a:ext cx="5212080" cy="201168"/>
+          </a:xfrm>
+          <a:prstGeom prst="rect">
+            <a:avLst/>
+          </a:prstGeom>
+          <a:noFill/>
+        </p:spPr>
+        <p:txBody>
+          <a:bodyPr wrap="none">
+            <a:spAutoFit/>
+          </a:bodyPr>
+          <a:lstStyle/>
+          <a:p>
+            <a:pPr algn="l"/>
+            <a:r>
+              <a:rPr sz="700" b="0">
+                <a:solidFill>
+                  <a:srgbClr val="666666"/>
+                </a:solidFill>
+                <a:latin typeface="Arial"/>
+              </a:rPr>
+              <a:t>https://www.youtube.com/watch?v=2a1YM7MCXng</a:t>
+            </a:r>
+          </a:p>
+        </p:txBody>
+      </p:sp>
+      <p:sp>
+        <p:nvSpPr>
+          <p:cNvPr id="11" name="Rectangle 10"/>
           <p:cNvSpPr/>
           <p:nvPr/>
         </p:nvSpPr>
@@ -7599,7 +8159,7 @@
       </p:sp>
       <p:pic>
         <p:nvPicPr>
-          <p:cNvPr id="11" name="Picture 10" descr="image.jpg"/>
+          <p:cNvPr id="12" name="Picture 11" descr="image.jpg"/>
           <p:cNvPicPr>
             <a:picLocks noChangeAspect="1"/>
           </p:cNvPicPr>
@@ -7623,7 +8183,7 @@
       </p:pic>
       <p:sp>
         <p:nvSpPr>
-          <p:cNvPr id="12" name="TextBox 11"/>
+          <p:cNvPr id="13" name="TextBox 12"/>
           <p:cNvSpPr txBox="1"/>
           <p:nvPr/>
         </p:nvSpPr>
@@ -7658,7 +8218,7 @@
       </p:sp>
       <p:sp>
         <p:nvSpPr>
-          <p:cNvPr id="13" name="TextBox 12"/>
+          <p:cNvPr id="14" name="TextBox 13"/>
           <p:cNvSpPr txBox="1"/>
           <p:nvPr/>
         </p:nvSpPr>
@@ -7694,7 +8254,7 @@
       </p:sp>
       <p:pic>
         <p:nvPicPr>
-          <p:cNvPr id="14" name="Picture 13" descr="image.png"/>
+          <p:cNvPr id="15" name="Picture 14" descr="image.png"/>
           <p:cNvPicPr>
             <a:picLocks noChangeAspect="1"/>
           </p:cNvPicPr>
@@ -7718,7 +8278,7 @@
       </p:pic>
       <p:sp>
         <p:nvSpPr>
-          <p:cNvPr id="15" name="TextBox 14"/>
+          <p:cNvPr id="16" name="TextBox 15"/>
           <p:cNvSpPr txBox="1"/>
           <p:nvPr/>
         </p:nvSpPr>
@@ -7753,7 +8313,42 @@
       </p:sp>
       <p:sp>
         <p:nvSpPr>
-          <p:cNvPr id="16" name="Rectangle 15"/>
+          <p:cNvPr id="17" name="TextBox 16"/>
+          <p:cNvSpPr txBox="1"/>
+          <p:nvPr/>
+        </p:nvSpPr>
+        <p:spPr>
+          <a:xfrm>
+            <a:off x="2697480" y="2267712"/>
+            <a:ext cx="5212080" cy="201168"/>
+          </a:xfrm>
+          <a:prstGeom prst="rect">
+            <a:avLst/>
+          </a:prstGeom>
+          <a:noFill/>
+        </p:spPr>
+        <p:txBody>
+          <a:bodyPr wrap="none">
+            <a:spAutoFit/>
+          </a:bodyPr>
+          <a:lstStyle/>
+          <a:p>
+            <a:pPr algn="l"/>
+            <a:r>
+              <a:rPr sz="700" b="0">
+                <a:solidFill>
+                  <a:srgbClr val="666666"/>
+                </a:solidFill>
+                <a:latin typeface="Arial"/>
+              </a:rPr>
+              <a:t>https://www.youtube.com/watch?v=OhHzzl4Z6qU</a:t>
+            </a:r>
+          </a:p>
+        </p:txBody>
+      </p:sp>
+      <p:sp>
+        <p:nvSpPr>
+          <p:cNvPr id="18" name="Rectangle 17"/>
           <p:cNvSpPr/>
           <p:nvPr/>
         </p:nvSpPr>
@@ -7798,7 +8393,7 @@
       </p:sp>
       <p:pic>
         <p:nvPicPr>
-          <p:cNvPr id="17" name="Picture 16" descr="image.jpg"/>
+          <p:cNvPr id="19" name="Picture 18" descr="image.jpg"/>
           <p:cNvPicPr>
             <a:picLocks noChangeAspect="1"/>
           </p:cNvPicPr>
@@ -7822,7 +8417,7 @@
       </p:pic>
       <p:sp>
         <p:nvSpPr>
-          <p:cNvPr id="18" name="TextBox 17"/>
+          <p:cNvPr id="20" name="TextBox 19"/>
           <p:cNvSpPr txBox="1"/>
           <p:nvPr/>
         </p:nvSpPr>
@@ -7857,7 +8452,7 @@
       </p:sp>
       <p:sp>
         <p:nvSpPr>
-          <p:cNvPr id="19" name="TextBox 18"/>
+          <p:cNvPr id="21" name="TextBox 20"/>
           <p:cNvSpPr txBox="1"/>
           <p:nvPr/>
         </p:nvSpPr>
@@ -7893,7 +8488,7 @@
       </p:sp>
       <p:pic>
         <p:nvPicPr>
-          <p:cNvPr id="20" name="Picture 19" descr="image.png"/>
+          <p:cNvPr id="22" name="Picture 21" descr="image.png"/>
           <p:cNvPicPr>
             <a:picLocks noChangeAspect="1"/>
           </p:cNvPicPr>
@@ -7917,7 +8512,7 @@
       </p:pic>
       <p:sp>
         <p:nvSpPr>
-          <p:cNvPr id="21" name="TextBox 20"/>
+          <p:cNvPr id="23" name="TextBox 22"/>
           <p:cNvSpPr txBox="1"/>
           <p:nvPr/>
         </p:nvSpPr>
@@ -7952,7 +8547,42 @@
       </p:sp>
       <p:sp>
         <p:nvSpPr>
-          <p:cNvPr id="22" name="Rectangle 21"/>
+          <p:cNvPr id="24" name="TextBox 23"/>
+          <p:cNvSpPr txBox="1"/>
+          <p:nvPr/>
+        </p:nvSpPr>
+        <p:spPr>
+          <a:xfrm>
+            <a:off x="2697480" y="3145536"/>
+            <a:ext cx="5212080" cy="201168"/>
+          </a:xfrm>
+          <a:prstGeom prst="rect">
+            <a:avLst/>
+          </a:prstGeom>
+          <a:noFill/>
+        </p:spPr>
+        <p:txBody>
+          <a:bodyPr wrap="none">
+            <a:spAutoFit/>
+          </a:bodyPr>
+          <a:lstStyle/>
+          <a:p>
+            <a:pPr algn="l"/>
+            <a:r>
+              <a:rPr sz="700" b="0">
+                <a:solidFill>
+                  <a:srgbClr val="666666"/>
+                </a:solidFill>
+                <a:latin typeface="Arial"/>
+              </a:rPr>
+              <a:t>https://www.youtube.com/watch?v=KWYewgdSAOI</a:t>
+            </a:r>
+          </a:p>
+        </p:txBody>
+      </p:sp>
+      <p:sp>
+        <p:nvSpPr>
+          <p:cNvPr id="25" name="Rectangle 24"/>
           <p:cNvSpPr/>
           <p:nvPr/>
         </p:nvSpPr>
@@ -7997,7 +8627,7 @@
       </p:sp>
       <p:pic>
         <p:nvPicPr>
-          <p:cNvPr id="23" name="Picture 22" descr="image.jpg"/>
+          <p:cNvPr id="26" name="Picture 25" descr="image.jpg"/>
           <p:cNvPicPr>
             <a:picLocks noChangeAspect="1"/>
           </p:cNvPicPr>
@@ -8021,7 +8651,7 @@
       </p:pic>
       <p:sp>
         <p:nvSpPr>
-          <p:cNvPr id="24" name="TextBox 23"/>
+          <p:cNvPr id="27" name="TextBox 26"/>
           <p:cNvSpPr txBox="1"/>
           <p:nvPr/>
         </p:nvSpPr>
@@ -8056,7 +8686,7 @@
       </p:sp>
       <p:sp>
         <p:nvSpPr>
-          <p:cNvPr id="25" name="TextBox 24"/>
+          <p:cNvPr id="28" name="TextBox 27"/>
           <p:cNvSpPr txBox="1"/>
           <p:nvPr/>
         </p:nvSpPr>
@@ -8092,7 +8722,7 @@
       </p:sp>
       <p:pic>
         <p:nvPicPr>
-          <p:cNvPr id="26" name="Picture 25" descr="image.png"/>
+          <p:cNvPr id="29" name="Picture 28" descr="image.png"/>
           <p:cNvPicPr>
             <a:picLocks noChangeAspect="1"/>
           </p:cNvPicPr>
@@ -8116,7 +8746,7 @@
       </p:pic>
       <p:sp>
         <p:nvSpPr>
-          <p:cNvPr id="27" name="TextBox 26"/>
+          <p:cNvPr id="30" name="TextBox 29"/>
           <p:cNvSpPr txBox="1"/>
           <p:nvPr/>
         </p:nvSpPr>
@@ -8151,7 +8781,42 @@
       </p:sp>
       <p:sp>
         <p:nvSpPr>
-          <p:cNvPr id="28" name="Rectangle 27"/>
+          <p:cNvPr id="31" name="TextBox 30"/>
+          <p:cNvSpPr txBox="1"/>
+          <p:nvPr/>
+        </p:nvSpPr>
+        <p:spPr>
+          <a:xfrm>
+            <a:off x="2697480" y="4023360"/>
+            <a:ext cx="5212080" cy="201168"/>
+          </a:xfrm>
+          <a:prstGeom prst="rect">
+            <a:avLst/>
+          </a:prstGeom>
+          <a:noFill/>
+        </p:spPr>
+        <p:txBody>
+          <a:bodyPr wrap="none">
+            <a:spAutoFit/>
+          </a:bodyPr>
+          <a:lstStyle/>
+          <a:p>
+            <a:pPr algn="l"/>
+            <a:r>
+              <a:rPr sz="700" b="0">
+                <a:solidFill>
+                  <a:srgbClr val="666666"/>
+                </a:solidFill>
+                <a:latin typeface="Arial"/>
+              </a:rPr>
+              <a:t>https://www.youtube.com/watch?v=HQDUEU-Zhyc</a:t>
+            </a:r>
+          </a:p>
+        </p:txBody>
+      </p:sp>
+      <p:sp>
+        <p:nvSpPr>
+          <p:cNvPr id="32" name="Rectangle 31"/>
           <p:cNvSpPr/>
           <p:nvPr/>
         </p:nvSpPr>
@@ -8196,7 +8861,7 @@
       </p:sp>
       <p:pic>
         <p:nvPicPr>
-          <p:cNvPr id="29" name="Picture 28" descr="image.jpg"/>
+          <p:cNvPr id="33" name="Picture 32" descr="image.jpg"/>
           <p:cNvPicPr>
             <a:picLocks noChangeAspect="1"/>
           </p:cNvPicPr>
@@ -8220,7 +8885,7 @@
       </p:pic>
       <p:sp>
         <p:nvSpPr>
-          <p:cNvPr id="30" name="TextBox 29"/>
+          <p:cNvPr id="34" name="TextBox 33"/>
           <p:cNvSpPr txBox="1"/>
           <p:nvPr/>
         </p:nvSpPr>
@@ -8255,7 +8920,7 @@
       </p:sp>
       <p:sp>
         <p:nvSpPr>
-          <p:cNvPr id="31" name="TextBox 30"/>
+          <p:cNvPr id="35" name="TextBox 34"/>
           <p:cNvSpPr txBox="1"/>
           <p:nvPr/>
         </p:nvSpPr>
@@ -8291,7 +8956,7 @@
       </p:sp>
       <p:pic>
         <p:nvPicPr>
-          <p:cNvPr id="32" name="Picture 31" descr="image.png"/>
+          <p:cNvPr id="36" name="Picture 35" descr="image.png"/>
           <p:cNvPicPr>
             <a:picLocks noChangeAspect="1"/>
           </p:cNvPicPr>
@@ -8315,7 +8980,7 @@
       </p:pic>
       <p:sp>
         <p:nvSpPr>
-          <p:cNvPr id="33" name="TextBox 32"/>
+          <p:cNvPr id="37" name="TextBox 36"/>
           <p:cNvSpPr txBox="1"/>
           <p:nvPr/>
         </p:nvSpPr>
@@ -8344,6 +9009,41 @@
                 <a:latin typeface="Arial"/>
               </a:rPr>
               <a:t>📺 2ch有益プラネット【ゆっくり解説】  👁 2,960,043  👍 35,345  ⏱ 0:59  📅 2023-10-19</a:t>
+            </a:r>
+          </a:p>
+        </p:txBody>
+      </p:sp>
+      <p:sp>
+        <p:nvSpPr>
+          <p:cNvPr id="38" name="TextBox 37"/>
+          <p:cNvSpPr txBox="1"/>
+          <p:nvPr/>
+        </p:nvSpPr>
+        <p:spPr>
+          <a:xfrm>
+            <a:off x="2697480" y="4901184"/>
+            <a:ext cx="5212080" cy="201168"/>
+          </a:xfrm>
+          <a:prstGeom prst="rect">
+            <a:avLst/>
+          </a:prstGeom>
+          <a:noFill/>
+        </p:spPr>
+        <p:txBody>
+          <a:bodyPr wrap="none">
+            <a:spAutoFit/>
+          </a:bodyPr>
+          <a:lstStyle/>
+          <a:p>
+            <a:pPr algn="l"/>
+            <a:r>
+              <a:rPr sz="700" b="0">
+                <a:solidFill>
+                  <a:srgbClr val="666666"/>
+                </a:solidFill>
+                <a:latin typeface="Arial"/>
+              </a:rPr>
+              <a:t>https://www.youtube.com/watch?v=J4JTp1tNrkk</a:t>
             </a:r>
           </a:p>
         </p:txBody>

--- a/youtube_ranking_20260517.pptx
+++ b/youtube_ranking_20260517.pptx
@@ -3573,7 +3573,7 @@
                 </a:solidFill>
                 <a:latin typeface="Arial"/>
               </a:rPr>
-              <a:t>⏱ 0:31  ·  📅 公開2時間前</a:t>
+              <a:t>⏱ 0:31  ·  📅 公開12時間前</a:t>
             </a:r>
           </a:p>
         </p:txBody>
@@ -3608,7 +3608,7 @@
                 </a:solidFill>
                 <a:latin typeface="Arial"/>
               </a:rPr>
-              <a:t>💡 公開2時間で急上昇入り！　急上昇中の新興コンテンツ　いいね率3.2%と好評価</a:t>
+              <a:t>💡 公開12時間で急上昇入り！　急上昇中の新興コンテンツ　いいね率3.2%と好評価</a:t>
             </a:r>
           </a:p>
         </p:txBody>
@@ -3909,7 +3909,7 @@
                 </a:solidFill>
                 <a:latin typeface="Arial"/>
               </a:rPr>
-              <a:t>👁 248,983  👍 18,630  💬 1,113  ⏱ 3:43  📅 公開14時間前</a:t>
+              <a:t>👁 248,983  👍 18,630  💬 1,113  ⏱ 3:43  📅 公開24時間前</a:t>
             </a:r>
           </a:p>
         </p:txBody>
@@ -3944,7 +3944,7 @@
                 </a:solidFill>
                 <a:latin typeface="Arial"/>
               </a:rPr>
-              <a:t>💡 公開14時間で急上昇入り！　10万再生突破の話題作　いいね率7.5%と視聴者の支持が非常に高い</a:t>
+              <a:t>💡 公開24時間で急上昇入り！　10万再生突破の話題作　いいね率7.5%と視聴者の支持が非常に高い</a:t>
             </a:r>
           </a:p>
         </p:txBody>
@@ -9363,7 +9363,7 @@
                 </a:solidFill>
                 <a:latin typeface="Arial"/>
               </a:rPr>
-              <a:t>⏱ 3:22  ·  📅 公開41時間前</a:t>
+              <a:t>⏱ 3:22  ·  📅 公開51時間前</a:t>
             </a:r>
           </a:p>
         </p:txBody>
@@ -9398,7 +9398,7 @@
                 </a:solidFill>
                 <a:latin typeface="Arial"/>
               </a:rPr>
-              <a:t>💡 公開1日で急上昇　50万再生の注目コンテンツ　前日比+87.9%と急拡散中</a:t>
+              <a:t>💡 公開2日で急上昇　50万再生の注目コンテンツ　前日比+87.9%と急拡散中</a:t>
             </a:r>
           </a:p>
         </p:txBody>
@@ -9718,7 +9718,7 @@
                 </a:solidFill>
                 <a:latin typeface="Arial"/>
               </a:rPr>
-              <a:t>⏱ 6:44:18  ·  📅 公開-5時間前</a:t>
+              <a:t>⏱ 6:44:18  ·  📅 公開4時間前</a:t>
             </a:r>
           </a:p>
         </p:txBody>
@@ -9753,7 +9753,7 @@
                 </a:solidFill>
                 <a:latin typeface="Arial"/>
               </a:rPr>
-              <a:t>💡 公開-5時間で急上昇入り！　急上昇中の新興コンテンツ</a:t>
+              <a:t>💡 公開4時間で急上昇入り！　急上昇中の新興コンテンツ</a:t>
             </a:r>
           </a:p>
         </p:txBody>
@@ -10073,7 +10073,7 @@
                 </a:solidFill>
                 <a:latin typeface="Arial"/>
               </a:rPr>
-              <a:t>⏱ 4:12  ·  📅 公開40時間前</a:t>
+              <a:t>⏱ 4:12  ·  📅 公開50時間前</a:t>
             </a:r>
           </a:p>
         </p:txBody>
@@ -10108,7 +10108,7 @@
                 </a:solidFill>
                 <a:latin typeface="Arial"/>
               </a:rPr>
-              <a:t>💡 公開1日で急上昇　100万再生超の大ヒット　前日比+96.6%と急拡散中</a:t>
+              <a:t>💡 公開2日で急上昇　100万再生超の大ヒット　前日比+96.6%と急拡散中</a:t>
             </a:r>
           </a:p>
         </p:txBody>
@@ -10428,7 +10428,7 @@
                 </a:solidFill>
                 <a:latin typeface="Arial"/>
               </a:rPr>
-              <a:t>⏱ 48:57  ·  📅 公開-1時間前</a:t>
+              <a:t>⏱ 48:57  ·  📅 公開8時間前</a:t>
             </a:r>
           </a:p>
         </p:txBody>
@@ -10463,7 +10463,7 @@
                 </a:solidFill>
                 <a:latin typeface="Arial"/>
               </a:rPr>
-              <a:t>💡 公開-1時間で急上昇入り！　急上昇中の新興コンテンツ　いいね率4.1%と好評価</a:t>
+              <a:t>💡 公開8時間で急上昇入り！　急上昇中の新興コンテンツ　いいね率4.1%と好評価</a:t>
             </a:r>
           </a:p>
         </p:txBody>
@@ -10783,7 +10783,7 @@
                 </a:solidFill>
                 <a:latin typeface="Arial"/>
               </a:rPr>
-              <a:t>⏱ 3:47  ·  📅 公開18時間前</a:t>
+              <a:t>⏱ 3:47  ·  📅 公開28時間前</a:t>
             </a:r>
           </a:p>
         </p:txBody>
@@ -10818,7 +10818,7 @@
                 </a:solidFill>
                 <a:latin typeface="Arial"/>
               </a:rPr>
-              <a:t>💡 公開18時間で急上昇入り！　10万再生突破の話題作　いいね率7.7%と視聴者の支持が非常に高い</a:t>
+              <a:t>💡 公開1日で急上昇　10万再生突破の話題作　いいね率7.7%と視聴者の支持が非常に高い</a:t>
             </a:r>
           </a:p>
         </p:txBody>
@@ -11138,7 +11138,7 @@
                 </a:solidFill>
                 <a:latin typeface="Arial"/>
               </a:rPr>
-              <a:t>⏱ 57:45  ·  📅 公開0時間前</a:t>
+              <a:t>⏱ 57:45  ·  📅 公開10時間前</a:t>
             </a:r>
           </a:p>
         </p:txBody>
@@ -11173,7 +11173,7 @@
                 </a:solidFill>
                 <a:latin typeface="Arial"/>
               </a:rPr>
-              <a:t>💡 公開0時間で急上昇入り！　10万再生突破の話題作　いいね率3.8%と好評価</a:t>
+              <a:t>💡 公開10時間で急上昇入り！　10万再生突破の話題作　いいね率3.8%と好評価</a:t>
             </a:r>
           </a:p>
         </p:txBody>
@@ -11493,7 +11493,7 @@
                 </a:solidFill>
                 <a:latin typeface="Arial"/>
               </a:rPr>
-              <a:t>⏱ 3:34  ·  📅 公開39時間前</a:t>
+              <a:t>⏱ 3:34  ·  📅 公開49時間前</a:t>
             </a:r>
           </a:p>
         </p:txBody>
@@ -11528,7 +11528,7 @@
                 </a:solidFill>
                 <a:latin typeface="Arial"/>
               </a:rPr>
-              <a:t>💡 公開1日で急上昇　50万再生の注目コンテンツ　前日比+51.1%と急拡散中</a:t>
+              <a:t>💡 公開2日で急上昇　50万再生の注目コンテンツ　前日比+51.1%と急拡散中</a:t>
             </a:r>
           </a:p>
         </p:txBody>
@@ -11848,7 +11848,7 @@
                 </a:solidFill>
                 <a:latin typeface="Arial"/>
               </a:rPr>
-              <a:t>⏱ 5:00:37  ·  📅 公開-3時間前</a:t>
+              <a:t>⏱ 5:00:37  ·  📅 公開6時間前</a:t>
             </a:r>
           </a:p>
         </p:txBody>
@@ -11883,7 +11883,7 @@
                 </a:solidFill>
                 <a:latin typeface="Arial"/>
               </a:rPr>
-              <a:t>💡 公開-3時間で急上昇入り！　50万再生の注目コンテンツ</a:t>
+              <a:t>💡 公開6時間で急上昇入り！　50万再生の注目コンテンツ</a:t>
             </a:r>
           </a:p>
         </p:txBody>
